--- a/samples/cn_tech.pptx
+++ b/samples/cn_tech.pptx
@@ -8,10 +8,12 @@
     <p:sldId id="256" r:id="rId7"/>
     <p:sldId id="257" r:id="rId8"/>
     <p:sldId id="258" r:id="rId9"/>
-    <p:sldId id="259" r:id="rId11"/>
-    <p:sldId id="260" r:id="rId12"/>
-    <p:sldId id="261" r:id="rId13"/>
-    <p:sldId id="262" r:id="rId14"/>
+    <p:sldId id="259" r:id="rId10"/>
+    <p:sldId id="260" r:id="rId11"/>
+    <p:sldId id="261" r:id="rId12"/>
+    <p:sldId id="262" r:id="rId13"/>
+    <p:sldId id="263" r:id="rId14"/>
+    <p:sldId id="264" r:id="rId15"/>
   </p:sldIdLst>
   <p:sldSz cx="9144000" cy="6858000" type="screen4x3"/>
   <p:notesSz cx="6858000" cy="9144000"/>
@@ -113,564 +115,148 @@
 </p:presentation>
 </file>
 
-<file path=ppt/notesMasters/notesMaster1.xml><?xml version="1.0" encoding="utf-8"?>
-<p:notesMaster xmlns:a="http://schemas.openxmlformats.org/drawingml/2006/main" xmlns:p="http://schemas.openxmlformats.org/presentationml/2006/main" xmlns:r="http://schemas.openxmlformats.org/officeDocument/2006/relationships">
-  <p:cSld>
-    <p:bg>
-      <p:bgRef idx="1001">
-        <a:schemeClr val="bg1"/>
-      </p:bgRef>
-    </p:bg>
-    <p:spTree>
-      <p:nvGrpSpPr>
-        <p:cNvPr id="1" name=""/>
-        <p:cNvGrpSpPr/>
-        <p:nvPr/>
-      </p:nvGrpSpPr>
-      <p:grpSpPr>
-        <a:xfrm>
-          <a:off x="0" y="0"/>
-          <a:ext cx="0" cy="0"/>
-          <a:chOff x="0" y="0"/>
-          <a:chExt cx="0" cy="0"/>
-        </a:xfrm>
-      </p:grpSpPr>
-      <p:sp>
-        <p:nvSpPr>
-          <p:cNvPr id="2" name="Header Placeholder 1"/>
-          <p:cNvSpPr>
-            <a:spLocks noGrp="1"/>
-          </p:cNvSpPr>
-          <p:nvPr>
-            <p:ph type="hdr" sz="quarter"/>
-          </p:nvPr>
-        </p:nvSpPr>
-        <p:spPr>
-          <a:xfrm>
-            <a:off x="0" y="0"/>
-            <a:ext cx="2971800" cy="457200"/>
-          </a:xfrm>
-          <a:prstGeom prst="rect">
-            <a:avLst/>
-          </a:prstGeom>
-        </p:spPr>
-        <p:txBody>
-          <a:bodyPr vert="horz" lIns="91440" tIns="45720" rIns="91440" bIns="45720" rtlCol="0"/>
-          <a:lstStyle>
-            <a:lvl1pPr algn="l">
-              <a:defRPr sz="1200"/>
-            </a:lvl1pPr>
-          </a:lstStyle>
-          <a:p>
-            <a:endParaRPr lang="en-US"/>
-          </a:p>
-        </p:txBody>
-      </p:sp>
-      <p:sp>
-        <p:nvSpPr>
-          <p:cNvPr id="3" name="Date Placeholder 2"/>
-          <p:cNvSpPr>
-            <a:spLocks noGrp="1"/>
-          </p:cNvSpPr>
-          <p:nvPr>
-            <p:ph type="dt" idx="1"/>
-          </p:nvPr>
-        </p:nvSpPr>
-        <p:spPr>
-          <a:xfrm>
-            <a:off x="3884613" y="0"/>
-            <a:ext cx="2971800" cy="457200"/>
-          </a:xfrm>
-          <a:prstGeom prst="rect">
-            <a:avLst/>
-          </a:prstGeom>
-        </p:spPr>
-        <p:txBody>
-          <a:bodyPr vert="horz" lIns="91440" tIns="45720" rIns="91440" bIns="45720" rtlCol="0"/>
-          <a:lstStyle>
-            <a:lvl1pPr algn="r">
-              <a:defRPr sz="1200"/>
-            </a:lvl1pPr>
-          </a:lstStyle>
-          <a:p>
-            <a:fld id="{0F89C1C7-3DCD-1040-A9CF-14679D8B5DDD}" type="datetimeFigureOut">
-              <a:rPr lang="en-US" smtClean="0"/>
-              <a:t>10/17/16</a:t>
-            </a:fld>
-            <a:endParaRPr lang="en-US"/>
-          </a:p>
-        </p:txBody>
-      </p:sp>
-      <p:sp>
-        <p:nvSpPr>
-          <p:cNvPr id="4" name="Slide Image Placeholder 3"/>
-          <p:cNvSpPr>
-            <a:spLocks noGrp="1" noRot="1" noChangeAspect="1"/>
-          </p:cNvSpPr>
-          <p:nvPr>
-            <p:ph type="sldImg" idx="2"/>
-          </p:nvPr>
-        </p:nvSpPr>
-        <p:spPr>
-          <a:xfrm>
-            <a:off x="1143000" y="685800"/>
-            <a:ext cx="4572000" cy="3429000"/>
-          </a:xfrm>
-          <a:prstGeom prst="rect">
-            <a:avLst/>
-          </a:prstGeom>
-          <a:noFill/>
-          <a:ln w="12700">
-            <a:solidFill>
-              <a:prstClr val="black"/>
-            </a:solidFill>
-          </a:ln>
-        </p:spPr>
-        <p:txBody>
-          <a:bodyPr vert="horz" lIns="91440" tIns="45720" rIns="91440" bIns="45720" rtlCol="0" anchor="ctr"/>
-          <a:lstStyle/>
-          <a:p>
-            <a:endParaRPr lang="en-US"/>
-          </a:p>
-        </p:txBody>
-      </p:sp>
-      <p:sp>
-        <p:nvSpPr>
-          <p:cNvPr id="5" name="Notes Placeholder 4"/>
-          <p:cNvSpPr>
-            <a:spLocks noGrp="1"/>
-          </p:cNvSpPr>
-          <p:nvPr>
-            <p:ph type="body" sz="quarter" idx="3"/>
-          </p:nvPr>
-        </p:nvSpPr>
-        <p:spPr>
-          <a:xfrm>
-            <a:off x="685800" y="4343400"/>
-            <a:ext cx="5486400" cy="4114800"/>
-          </a:xfrm>
-          <a:prstGeom prst="rect">
-            <a:avLst/>
-          </a:prstGeom>
-        </p:spPr>
-        <p:txBody>
-          <a:bodyPr vert="horz" lIns="91440" tIns="45720" rIns="91440" bIns="45720" rtlCol="0"/>
-          <a:lstStyle/>
-          <a:p>
-            <a:pPr lvl="0"/>
-            <a:r>
-              <a:rPr lang="en-US" smtClean="0"/>
-              <a:t>Click to edit Master text styles</a:t>
-            </a:r>
-          </a:p>
-          <a:p>
-            <a:pPr lvl="1"/>
-            <a:r>
-              <a:rPr lang="en-US" smtClean="0"/>
-              <a:t>Second level</a:t>
-            </a:r>
-          </a:p>
-          <a:p>
-            <a:pPr lvl="2"/>
-            <a:r>
-              <a:rPr lang="en-US" smtClean="0"/>
-              <a:t>Third level</a:t>
-            </a:r>
-          </a:p>
-          <a:p>
-            <a:pPr lvl="3"/>
-            <a:r>
-              <a:rPr lang="en-US" smtClean="0"/>
-              <a:t>Fourth level</a:t>
-            </a:r>
-          </a:p>
-          <a:p>
-            <a:pPr lvl="4"/>
-            <a:r>
-              <a:rPr lang="en-US" smtClean="0"/>
-              <a:t>Fifth level</a:t>
-            </a:r>
-            <a:endParaRPr lang="en-US"/>
-          </a:p>
-        </p:txBody>
-      </p:sp>
-      <p:sp>
-        <p:nvSpPr>
-          <p:cNvPr id="6" name="Footer Placeholder 5"/>
-          <p:cNvSpPr>
-            <a:spLocks noGrp="1"/>
-          </p:cNvSpPr>
-          <p:nvPr>
-            <p:ph type="ftr" sz="quarter" idx="4"/>
-          </p:nvPr>
-        </p:nvSpPr>
-        <p:spPr>
-          <a:xfrm>
-            <a:off x="0" y="8685213"/>
-            <a:ext cx="2971800" cy="457200"/>
-          </a:xfrm>
-          <a:prstGeom prst="rect">
-            <a:avLst/>
-          </a:prstGeom>
-        </p:spPr>
-        <p:txBody>
-          <a:bodyPr vert="horz" lIns="91440" tIns="45720" rIns="91440" bIns="45720" rtlCol="0" anchor="b"/>
-          <a:lstStyle>
-            <a:lvl1pPr algn="l">
-              <a:defRPr sz="1200"/>
-            </a:lvl1pPr>
-          </a:lstStyle>
-          <a:p>
-            <a:endParaRPr lang="en-US"/>
-          </a:p>
-        </p:txBody>
-      </p:sp>
-      <p:sp>
-        <p:nvSpPr>
-          <p:cNvPr id="7" name="Slide Number Placeholder 6"/>
-          <p:cNvSpPr>
-            <a:spLocks noGrp="1"/>
-          </p:cNvSpPr>
-          <p:nvPr>
-            <p:ph type="sldNum" sz="quarter" idx="5"/>
-          </p:nvPr>
-        </p:nvSpPr>
-        <p:spPr>
-          <a:xfrm>
-            <a:off x="3884613" y="8685213"/>
-            <a:ext cx="2971800" cy="457200"/>
-          </a:xfrm>
-          <a:prstGeom prst="rect">
-            <a:avLst/>
-          </a:prstGeom>
-        </p:spPr>
-        <p:txBody>
-          <a:bodyPr vert="horz" lIns="91440" tIns="45720" rIns="91440" bIns="45720" rtlCol="0" anchor="b"/>
-          <a:lstStyle>
-            <a:lvl1pPr algn="r">
-              <a:defRPr sz="1200"/>
-            </a:lvl1pPr>
-          </a:lstStyle>
-          <a:p>
-            <a:fld id="{BB5E49A5-4136-284D-997B-48E1D791AD67}" type="slidenum">
-              <a:rPr lang="en-US" smtClean="0"/>
-              <a:t>‹#›</a:t>
-            </a:fld>
-            <a:endParaRPr lang="en-US"/>
-          </a:p>
-        </p:txBody>
-      </p:sp>
-    </p:spTree>
-    <p:extLst>
-      <p:ext uri="{BB962C8B-B14F-4D97-AF65-F5344CB8AC3E}">
-        <p14:creationId xmlns:p14="http://schemas.microsoft.com/office/powerpoint/2010/main" val="2623252185"/>
-      </p:ext>
-    </p:extLst>
-  </p:cSld>
-  <p:clrMap bg1="lt1" tx1="dk1" bg2="lt2" tx2="dk2" accent1="accent1" accent2="accent2" accent3="accent3" accent4="accent4" accent5="accent5" accent6="accent6" hlink="hlink" folHlink="folHlink"/>
-  <p:notesStyle>
-    <a:lvl1pPr marL="0" algn="l" defTabSz="457200" rtl="0" eaLnBrk="1" latinLnBrk="0" hangingPunct="1">
-      <a:defRPr sz="1200" kern="1200">
-        <a:solidFill>
-          <a:schemeClr val="tx1"/>
-        </a:solidFill>
-        <a:latin typeface="+mn-lt"/>
-        <a:ea typeface="+mn-ea"/>
-        <a:cs typeface="+mn-cs"/>
-      </a:defRPr>
-    </a:lvl1pPr>
-    <a:lvl2pPr marL="457200" algn="l" defTabSz="457200" rtl="0" eaLnBrk="1" latinLnBrk="0" hangingPunct="1">
-      <a:defRPr sz="1200" kern="1200">
-        <a:solidFill>
-          <a:schemeClr val="tx1"/>
-        </a:solidFill>
-        <a:latin typeface="+mn-lt"/>
-        <a:ea typeface="+mn-ea"/>
-        <a:cs typeface="+mn-cs"/>
-      </a:defRPr>
-    </a:lvl2pPr>
-    <a:lvl3pPr marL="914400" algn="l" defTabSz="457200" rtl="0" eaLnBrk="1" latinLnBrk="0" hangingPunct="1">
-      <a:defRPr sz="1200" kern="1200">
-        <a:solidFill>
-          <a:schemeClr val="tx1"/>
-        </a:solidFill>
-        <a:latin typeface="+mn-lt"/>
-        <a:ea typeface="+mn-ea"/>
-        <a:cs typeface="+mn-cs"/>
-      </a:defRPr>
-    </a:lvl3pPr>
-    <a:lvl4pPr marL="1371600" algn="l" defTabSz="457200" rtl="0" eaLnBrk="1" latinLnBrk="0" hangingPunct="1">
-      <a:defRPr sz="1200" kern="1200">
-        <a:solidFill>
-          <a:schemeClr val="tx1"/>
-        </a:solidFill>
-        <a:latin typeface="+mn-lt"/>
-        <a:ea typeface="+mn-ea"/>
-        <a:cs typeface="+mn-cs"/>
-      </a:defRPr>
-    </a:lvl4pPr>
-    <a:lvl5pPr marL="1828800" algn="l" defTabSz="457200" rtl="0" eaLnBrk="1" latinLnBrk="0" hangingPunct="1">
-      <a:defRPr sz="1200" kern="1200">
-        <a:solidFill>
-          <a:schemeClr val="tx1"/>
-        </a:solidFill>
-        <a:latin typeface="+mn-lt"/>
-        <a:ea typeface="+mn-ea"/>
-        <a:cs typeface="+mn-cs"/>
-      </a:defRPr>
-    </a:lvl5pPr>
-    <a:lvl6pPr marL="2286000" algn="l" defTabSz="457200" rtl="0" eaLnBrk="1" latinLnBrk="0" hangingPunct="1">
-      <a:defRPr sz="1200" kern="1200">
-        <a:solidFill>
-          <a:schemeClr val="tx1"/>
-        </a:solidFill>
-        <a:latin typeface="+mn-lt"/>
-        <a:ea typeface="+mn-ea"/>
-        <a:cs typeface="+mn-cs"/>
-      </a:defRPr>
-    </a:lvl6pPr>
-    <a:lvl7pPr marL="2743200" algn="l" defTabSz="457200" rtl="0" eaLnBrk="1" latinLnBrk="0" hangingPunct="1">
-      <a:defRPr sz="1200" kern="1200">
-        <a:solidFill>
-          <a:schemeClr val="tx1"/>
-        </a:solidFill>
-        <a:latin typeface="+mn-lt"/>
-        <a:ea typeface="+mn-ea"/>
-        <a:cs typeface="+mn-cs"/>
-      </a:defRPr>
-    </a:lvl7pPr>
-    <a:lvl8pPr marL="3200400" algn="l" defTabSz="457200" rtl="0" eaLnBrk="1" latinLnBrk="0" hangingPunct="1">
-      <a:defRPr sz="1200" kern="1200">
-        <a:solidFill>
-          <a:schemeClr val="tx1"/>
-        </a:solidFill>
-        <a:latin typeface="+mn-lt"/>
-        <a:ea typeface="+mn-ea"/>
-        <a:cs typeface="+mn-cs"/>
-      </a:defRPr>
-    </a:lvl8pPr>
-    <a:lvl9pPr marL="3657600" algn="l" defTabSz="457200" rtl="0" eaLnBrk="1" latinLnBrk="0" hangingPunct="1">
-      <a:defRPr sz="1200" kern="1200">
-        <a:solidFill>
-          <a:schemeClr val="tx1"/>
-        </a:solidFill>
-        <a:latin typeface="+mn-lt"/>
-        <a:ea typeface="+mn-ea"/>
-        <a:cs typeface="+mn-cs"/>
-      </a:defRPr>
-    </a:lvl9pPr>
-  </p:notesStyle>
-</p:notesMaster>
-</file>
-
-<file path=ppt/notesSlides/notesSlide1.xml><?xml version="1.0" encoding="utf-8"?>
-<p:notes xmlns:a="http://schemas.openxmlformats.org/drawingml/2006/main" xmlns:p="http://schemas.openxmlformats.org/presentationml/2006/main" xmlns:r="http://schemas.openxmlformats.org/officeDocument/2006/relationships">
-  <p:cSld>
-    <p:spTree>
-      <p:nvGrpSpPr>
-        <p:cNvPr id="1" name=""/>
-        <p:cNvGrpSpPr/>
-        <p:nvPr/>
-      </p:nvGrpSpPr>
-      <p:grpSpPr>
-        <a:xfrm>
-          <a:off x="0" y="0"/>
-          <a:ext cx="0" cy="0"/>
-          <a:chOff x="0" y="0"/>
-          <a:chExt cx="0" cy="0"/>
-        </a:xfrm>
-      </p:grpSpPr>
-      <p:sp>
-        <p:nvSpPr>
-          <p:cNvPr id="2" name="Slide Image Placeholder 1"/>
-          <p:cNvSpPr>
-            <a:spLocks noGrp="1"/>
-          </p:cNvSpPr>
-          <p:nvPr>
-            <p:ph type="sldImg" idx="2"/>
-          </p:nvPr>
-        </p:nvSpPr>
-        <p:spPr/>
-      </p:sp>
-      <p:sp>
-        <p:nvSpPr>
-          <p:cNvPr id="3" name="Notes Placeholder 2"/>
-          <p:cNvSpPr>
-            <a:spLocks noGrp="1"/>
-          </p:cNvSpPr>
-          <p:nvPr>
-            <p:ph type="body" idx="3" sz="quarter"/>
-          </p:nvPr>
-        </p:nvSpPr>
-        <p:spPr/>
-        <p:txBody>
+<file path=ppt/charts/chart1.xml><?xml version="1.0" encoding="utf-8"?>
+<c:chartSpace xmlns:c="http://schemas.openxmlformats.org/drawingml/2006/chart" xmlns:a="http://schemas.openxmlformats.org/drawingml/2006/main" xmlns:r="http://schemas.openxmlformats.org/officeDocument/2006/relationships">
+  <c:date1904 val="0"/>
+  <c:chart>
+    <c:title>
+      <c:tx>
+        <c:rich>
           <a:bodyPr/>
           <a:lstStyle/>
           <a:p>
             <a:r>
-              <a:t>本节介绍 AI 的前身及其早期的哲学与数学基础，重点强调对人类智能的逻辑模拟尝试。</a:t>
-            </a:r>
-          </a:p>
-        </p:txBody>
-      </p:sp>
-      <p:sp>
-        <p:nvSpPr>
-          <p:cNvPr id="4" name="Slide Number Placeholder 3"/>
-          <p:cNvSpPr>
-            <a:spLocks noGrp="1"/>
-          </p:cNvSpPr>
-          <p:nvPr>
-            <p:ph type="sldNum" idx="5" sz="quarter"/>
-          </p:nvPr>
-        </p:nvSpPr>
-        <p:spPr/>
-      </p:sp>
-    </p:spTree>
-  </p:cSld>
-  <p:clrMapOvr>
-    <a:masterClrMapping/>
-  </p:clrMapOvr>
-</p:notes>
-</file>
-
-<file path=ppt/notesSlides/notesSlide2.xml><?xml version="1.0" encoding="utf-8"?>
-<p:notes xmlns:a="http://schemas.openxmlformats.org/drawingml/2006/main" xmlns:p="http://schemas.openxmlformats.org/presentationml/2006/main" xmlns:r="http://schemas.openxmlformats.org/officeDocument/2006/relationships">
-  <p:cSld>
-    <p:spTree>
-      <p:nvGrpSpPr>
-        <p:cNvPr id="1" name=""/>
-        <p:cNvGrpSpPr/>
-        <p:nvPr/>
-      </p:nvGrpSpPr>
-      <p:grpSpPr>
-        <a:xfrm>
-          <a:off x="0" y="0"/>
-          <a:ext cx="0" cy="0"/>
-          <a:chOff x="0" y="0"/>
-          <a:chExt cx="0" cy="0"/>
-        </a:xfrm>
-      </p:grpSpPr>
-      <p:sp>
-        <p:nvSpPr>
-          <p:cNvPr id="2" name="Slide Image Placeholder 1"/>
-          <p:cNvSpPr>
-            <a:spLocks noGrp="1"/>
-          </p:cNvSpPr>
-          <p:nvPr>
-            <p:ph type="sldImg" idx="2"/>
-          </p:nvPr>
-        </p:nvSpPr>
-        <p:spPr/>
-      </p:sp>
-      <p:sp>
-        <p:nvSpPr>
-          <p:cNvPr id="3" name="Notes Placeholder 2"/>
-          <p:cNvSpPr>
-            <a:spLocks noGrp="1"/>
-          </p:cNvSpPr>
-          <p:nvPr>
-            <p:ph type="body" idx="3" sz="quarter"/>
-          </p:nvPr>
-        </p:nvSpPr>
-        <p:spPr/>
-        <p:txBody>
-          <a:bodyPr/>
-          <a:lstStyle/>
-          <a:p>
-            <a:r>
-              <a:t>介绍神经网络从被冷落到重新获得学术界关注的过程，为后来的深度学习爆发做铺垫。</a:t>
-            </a:r>
-          </a:p>
-        </p:txBody>
-      </p:sp>
-      <p:sp>
-        <p:nvSpPr>
-          <p:cNvPr id="4" name="Slide Number Placeholder 3"/>
-          <p:cNvSpPr>
-            <a:spLocks noGrp="1"/>
-          </p:cNvSpPr>
-          <p:nvPr>
-            <p:ph type="sldNum" idx="5" sz="quarter"/>
-          </p:nvPr>
-        </p:nvSpPr>
-        <p:spPr/>
-      </p:sp>
-    </p:spTree>
-  </p:cSld>
-  <p:clrMapOvr>
-    <a:masterClrMapping/>
-  </p:clrMapOvr>
-</p:notes>
-</file>
-
-<file path=ppt/notesSlides/notesSlide3.xml><?xml version="1.0" encoding="utf-8"?>
-<p:notes xmlns:a="http://schemas.openxmlformats.org/drawingml/2006/main" xmlns:p="http://schemas.openxmlformats.org/presentationml/2006/main" xmlns:r="http://schemas.openxmlformats.org/officeDocument/2006/relationships">
-  <p:cSld>
-    <p:spTree>
-      <p:nvGrpSpPr>
-        <p:cNvPr id="1" name=""/>
-        <p:cNvGrpSpPr/>
-        <p:nvPr/>
-      </p:nvGrpSpPr>
-      <p:grpSpPr>
-        <a:xfrm>
-          <a:off x="0" y="0"/>
-          <a:ext cx="0" cy="0"/>
-          <a:chOff x="0" y="0"/>
-          <a:chExt cx="0" cy="0"/>
-        </a:xfrm>
-      </p:grpSpPr>
-      <p:sp>
-        <p:nvSpPr>
-          <p:cNvPr id="2" name="Slide Image Placeholder 1"/>
-          <p:cNvSpPr>
-            <a:spLocks noGrp="1"/>
-          </p:cNvSpPr>
-          <p:nvPr>
-            <p:ph type="sldImg" idx="2"/>
-          </p:nvPr>
-        </p:nvSpPr>
-        <p:spPr/>
-      </p:sp>
-      <p:sp>
-        <p:nvSpPr>
-          <p:cNvPr id="3" name="Notes Placeholder 2"/>
-          <p:cNvSpPr>
-            <a:spLocks noGrp="1"/>
-          </p:cNvSpPr>
-          <p:nvPr>
-            <p:ph type="body" idx="3" sz="quarter"/>
-          </p:nvPr>
-        </p:nvSpPr>
-        <p:spPr/>
-        <p:txBody>
-          <a:bodyPr/>
-          <a:lstStyle/>
-          <a:p>
-            <a:r>
-              <a:t>分析深度学习在视觉和 NLP 领域的双重突破，揭示 Transformer 架构为何成为当今万物互联的技术底座。</a:t>
-            </a:r>
-          </a:p>
-        </p:txBody>
-      </p:sp>
-      <p:sp>
-        <p:nvSpPr>
-          <p:cNvPr id="4" name="Slide Number Placeholder 3"/>
-          <p:cNvSpPr>
-            <a:spLocks noGrp="1"/>
-          </p:cNvSpPr>
-          <p:nvPr>
-            <p:ph type="sldNum" idx="5" sz="quarter"/>
-          </p:nvPr>
-        </p:nvSpPr>
-        <p:spPr/>
-      </p:sp>
-    </p:spTree>
-  </p:cSld>
-  <p:clrMapOvr>
-    <a:masterClrMapping/>
-  </p:clrMapOvr>
-</p:notes>
+              <a:t>Capability Index</a:t>
+            </a:r>
+          </a:p>
+        </c:rich>
+      </c:tx>
+      <c:layout/>
+      <c:overlay val="0"/>
+    </c:title>
+    <c:autoTitleDeleted val="0"/>
+    <c:plotArea>
+      <c:lineChart>
+        <c:grouping val="standard"/>
+        <c:varyColors val="0"/>
+        <c:ser>
+          <c:idx val="0"/>
+          <c:order val="0"/>
+          <c:tx>
+            <c:strRef>
+              <c:f>Sheet1!$B$1</c:f>
+              <c:strCache>
+                <c:ptCount val="1"/>
+                <c:pt idx="0">
+                  <c:v>Capability Index</c:v>
+                </c:pt>
+              </c:strCache>
+            </c:strRef>
+          </c:tx>
+          <c:marker>
+            <c:symbol val="none"/>
+          </c:marker>
+          <c:cat>
+            <c:strRef>
+              <c:f>Sheet1!$A$2:$A$5</c:f>
+              <c:strCache>
+                <c:ptCount val="4"/>
+                <c:pt idx="0">
+                  <c:v>2023</c:v>
+                </c:pt>
+                <c:pt idx="1">
+                  <c:v>2024</c:v>
+                </c:pt>
+                <c:pt idx="2">
+                  <c:v>2025</c:v>
+                </c:pt>
+                <c:pt idx="3">
+                  <c:v>2026</c:v>
+                </c:pt>
+              </c:strCache>
+            </c:strRef>
+          </c:cat>
+          <c:val>
+            <c:numRef>
+              <c:f>Sheet1!$B$2:$B$5</c:f>
+              <c:numCache>
+                <c:formatCode>General</c:formatCode>
+                <c:ptCount val="4"/>
+                <c:pt idx="0">
+                  <c:v>42.0</c:v>
+                </c:pt>
+                <c:pt idx="1">
+                  <c:v>58.0</c:v>
+                </c:pt>
+                <c:pt idx="2">
+                  <c:v>71.0</c:v>
+                </c:pt>
+                <c:pt idx="3">
+                  <c:v>83.0</c:v>
+                </c:pt>
+              </c:numCache>
+            </c:numRef>
+          </c:val>
+          <c:smooth val="0"/>
+        </c:ser>
+        <c:marker val="1"/>
+        <c:smooth val="0"/>
+        <c:axId val="2118791784"/>
+        <c:axId val="2140495176"/>
+      </c:lineChart>
+      <c:catAx>
+        <c:axId val="2118791784"/>
+        <c:scaling>
+          <c:orientation val="minMax"/>
+        </c:scaling>
+        <c:delete val="0"/>
+        <c:axPos val="b"/>
+        <c:majorTickMark val="out"/>
+        <c:minorTickMark val="none"/>
+        <c:tickLblPos val="nextTo"/>
+        <c:crossAx val="2140495176"/>
+        <c:crosses val="autoZero"/>
+        <c:auto val="1"/>
+        <c:lblAlgn val="ctr"/>
+        <c:lblOffset val="100"/>
+        <c:noMultiLvlLbl val="0"/>
+      </c:catAx>
+      <c:valAx>
+        <c:axId val="2140495176"/>
+        <c:scaling/>
+        <c:delete val="0"/>
+        <c:axPos val="l"/>
+        <c:majorGridlines/>
+        <c:majorTickMark val="out"/>
+        <c:minorTickMark val="none"/>
+        <c:tickLblPos val="nextTo"/>
+        <c:crossAx val="2118791784"/>
+        <c:crosses val="autoZero"/>
+      </c:valAx>
+    </c:plotArea>
+    <c:legend>
+      <c:legendPos val="r"/>
+      <c:layout/>
+      <c:overlay val="0"/>
+    </c:legend>
+    <c:plotVisOnly val="1"/>
+    <c:dispBlanksAs val="gap"/>
+    <c:showDLblsOverMax val="0"/>
+  </c:chart>
+  <c:txPr>
+    <a:bodyPr/>
+    <a:lstStyle/>
+    <a:p>
+      <a:pPr>
+        <a:defRPr sz="1800"/>
+      </a:pPr>
+      <a:endParaRPr lang="en-US"/>
+    </a:p>
+  </c:txPr>
+  <c:externalData r:id="rId1">
+    <c:autoUpdate val="0"/>
+  </c:externalData>
+</c:chartSpace>
 </file>
 
 <file path=ppt/slideLayouts/slideLayout1.xml><?xml version="1.0" encoding="utf-8"?>
@@ -3649,9 +3235,17 @@
   <p:cSld>
     <p:bg>
       <p:bgPr>
-        <a:solidFill>
-          <a:srgbClr val="0A0A28"/>
-        </a:solidFill>
+        <a:gradFill rotWithShape="1">
+          <a:gsLst>
+            <a:gs pos="0">
+              <a:srgbClr val="2C42A2"/>
+            </a:gs>
+            <a:gs pos="100000">
+              <a:srgbClr val="6C2DA4"/>
+            </a:gs>
+          </a:gsLst>
+          <a:lin scaled="0" ang="5400000"/>
+        </a:gradFill>
         <a:effectLst/>
       </p:bgPr>
     </p:bg>
@@ -3664,54 +3258,276 @@
       <p:grpSpPr/>
       <p:sp>
         <p:nvSpPr>
-          <p:cNvPr id="2" name="Title 1"/>
-          <p:cNvSpPr>
-            <a:spLocks noGrp="1"/>
-          </p:cNvSpPr>
-          <p:nvPr>
-            <p:ph type="ctrTitle"/>
-          </p:nvPr>
-        </p:nvSpPr>
-        <p:spPr/>
-        <p:txBody>
-          <a:bodyPr/>
-          <a:lstStyle/>
-          <a:p>
-            <a:r>
-              <a:rPr>
-                <a:solidFill>
-                  <a:srgbClr val="0066CC"/>
-                </a:solidFill>
-                <a:latin typeface="Arial"/>
-              </a:rPr>
-              <a:t>人工智能：从图灵测试到通用人工智能 (AGI)</a:t>
-            </a:r>
-          </a:p>
-        </p:txBody>
-      </p:sp>
-      <p:sp>
-        <p:nvSpPr>
-          <p:cNvPr id="3" name="Subtitle 2"/>
-          <p:cNvSpPr>
-            <a:spLocks noGrp="1"/>
-          </p:cNvSpPr>
-          <p:nvPr>
-            <p:ph type="subTitle" idx="1"/>
-          </p:nvPr>
-        </p:nvSpPr>
-        <p:spPr/>
-        <p:txBody>
-          <a:bodyPr/>
-          <a:lstStyle/>
-          <a:p>
-            <a:r>
-              <a:rPr>
-                <a:solidFill>
-                  <a:srgbClr val="C8C8FF"/>
-                </a:solidFill>
-                <a:latin typeface="Arial"/>
-              </a:rPr>
-              <a:t>Topic: AI的发展历史与未来趋势</a:t>
+          <p:cNvPr id="2" name="TextBox 1"/>
+          <p:cNvSpPr txBox="1"/>
+          <p:nvPr/>
+        </p:nvSpPr>
+        <p:spPr>
+          <a:xfrm>
+            <a:off x="640080" y="411480"/>
+            <a:ext cx="7498079" cy="292608"/>
+          </a:xfrm>
+          <a:prstGeom prst="rect">
+            <a:avLst/>
+          </a:prstGeom>
+          <a:noFill/>
+        </p:spPr>
+        <p:txBody>
+          <a:bodyPr wrap="square" lIns="237744" rIns="237744" tIns="237744" bIns="237744">
+            <a:spAutoFit/>
+          </a:bodyPr>
+          <a:lstStyle/>
+          <a:p>
+            <a:pPr>
+              <a:spcAft>
+                <a:spcPts val="144"/>
+              </a:spcAft>
+              <a:defRPr sz="1200" b="1" i="0">
+                <a:solidFill>
+                  <a:srgbClr val="4FD8FF"/>
+                </a:solidFill>
+                <a:latin typeface="Aptos"/>
+              </a:defRPr>
+            </a:pPr>
+            <a:r>
+              <a:t>AUTOPPT</a:t>
+            </a:r>
+          </a:p>
+        </p:txBody>
+      </p:sp>
+      <p:sp>
+        <p:nvSpPr>
+          <p:cNvPr id="3" name="TextBox 2"/>
+          <p:cNvSpPr txBox="1"/>
+          <p:nvPr/>
+        </p:nvSpPr>
+        <p:spPr>
+          <a:xfrm>
+            <a:off x="640080" y="722376"/>
+            <a:ext cx="7498079" cy="1645920"/>
+          </a:xfrm>
+          <a:prstGeom prst="rect">
+            <a:avLst/>
+          </a:prstGeom>
+          <a:noFill/>
+        </p:spPr>
+        <p:txBody>
+          <a:bodyPr wrap="square" lIns="237744" rIns="237744" tIns="237744" bIns="237744">
+            <a:spAutoFit/>
+          </a:bodyPr>
+          <a:lstStyle/>
+          <a:p>
+            <a:pPr>
+              <a:spcAft>
+                <a:spcPts val="230"/>
+              </a:spcAft>
+              <a:defRPr sz="4600" b="1" i="0">
+                <a:solidFill>
+                  <a:srgbClr val="FFFFFF"/>
+                </a:solidFill>
+                <a:latin typeface="Aptos Display"/>
+              </a:defRPr>
+            </a:pPr>
+            <a:r>
+              <a:t>人工智能与未来科技</a:t>
+            </a:r>
+          </a:p>
+        </p:txBody>
+      </p:sp>
+      <p:sp>
+        <p:nvSpPr>
+          <p:cNvPr id="4" name="TextBox 3"/>
+          <p:cNvSpPr txBox="1"/>
+          <p:nvPr/>
+        </p:nvSpPr>
+        <p:spPr>
+          <a:xfrm>
+            <a:off x="640080" y="1673351"/>
+            <a:ext cx="7498079" cy="822960"/>
+          </a:xfrm>
+          <a:prstGeom prst="rect">
+            <a:avLst/>
+          </a:prstGeom>
+          <a:noFill/>
+        </p:spPr>
+        <p:txBody>
+          <a:bodyPr wrap="square" lIns="237744" rIns="237744" tIns="237744" bIns="237744">
+            <a:spAutoFit/>
+          </a:bodyPr>
+          <a:lstStyle/>
+          <a:p>
+            <a:pPr>
+              <a:spcAft>
+                <a:spcPts val="216"/>
+              </a:spcAft>
+              <a:defRPr sz="1800" b="0" i="0">
+                <a:solidFill>
+                  <a:srgbClr val="C6C9EA"/>
+                </a:solidFill>
+                <a:latin typeface="Aptos"/>
+              </a:defRPr>
+            </a:pPr>
+            <a:r>
+              <a:t>从模型能力到可运营系统</a:t>
+            </a:r>
+          </a:p>
+        </p:txBody>
+      </p:sp>
+      <p:sp>
+        <p:nvSpPr>
+          <p:cNvPr id="5" name="Rectangle 4"/>
+          <p:cNvSpPr/>
+          <p:nvPr/>
+        </p:nvSpPr>
+        <p:spPr>
+          <a:xfrm>
+            <a:off x="640080" y="1508760"/>
+            <a:ext cx="1371600" cy="45720"/>
+          </a:xfrm>
+          <a:prstGeom prst="rect">
+            <a:avLst/>
+          </a:prstGeom>
+          <a:solidFill>
+            <a:srgbClr val="4FD8FF"/>
+          </a:solidFill>
+          <a:ln>
+            <a:noFill/>
+          </a:ln>
+        </p:spPr>
+        <p:style>
+          <a:lnRef idx="1">
+            <a:schemeClr val="accent1"/>
+          </a:lnRef>
+          <a:fillRef idx="3">
+            <a:schemeClr val="accent1"/>
+          </a:fillRef>
+          <a:effectRef idx="2">
+            <a:schemeClr val="accent1"/>
+          </a:effectRef>
+          <a:fontRef idx="minor">
+            <a:schemeClr val="lt1"/>
+          </a:fontRef>
+        </p:style>
+        <p:txBody>
+          <a:bodyPr rtlCol="0" anchor="ctr"/>
+          <a:lstStyle/>
+          <a:p>
+            <a:pPr algn="ctr"/>
+          </a:p>
+        </p:txBody>
+      </p:sp>
+      <p:sp>
+        <p:nvSpPr>
+          <p:cNvPr id="6" name="Rounded Rectangle 5"/>
+          <p:cNvSpPr/>
+          <p:nvPr/>
+        </p:nvSpPr>
+        <p:spPr>
+          <a:xfrm>
+            <a:off x="640080" y="2194560"/>
+            <a:ext cx="3840480" cy="1325880"/>
+          </a:xfrm>
+          <a:prstGeom prst="roundRect">
+            <a:avLst/>
+          </a:prstGeom>
+          <a:solidFill>
+            <a:srgbClr val="222A76"/>
+          </a:solidFill>
+          <a:ln w="15875">
+            <a:solidFill>
+              <a:srgbClr val="7C96FF"/>
+            </a:solidFill>
+          </a:ln>
+        </p:spPr>
+        <p:style>
+          <a:lnRef idx="1">
+            <a:schemeClr val="accent1"/>
+          </a:lnRef>
+          <a:fillRef idx="3">
+            <a:schemeClr val="accent1"/>
+          </a:fillRef>
+          <a:effectRef idx="2">
+            <a:schemeClr val="accent1"/>
+          </a:effectRef>
+          <a:fontRef idx="minor">
+            <a:schemeClr val="lt1"/>
+          </a:fontRef>
+        </p:style>
+        <p:txBody>
+          <a:bodyPr rtlCol="0" anchor="ctr"/>
+          <a:lstStyle/>
+          <a:p>
+            <a:pPr algn="ctr"/>
+          </a:p>
+        </p:txBody>
+      </p:sp>
+      <p:sp>
+        <p:nvSpPr>
+          <p:cNvPr id="7" name="TextBox 6"/>
+          <p:cNvSpPr txBox="1"/>
+          <p:nvPr/>
+        </p:nvSpPr>
+        <p:spPr>
+          <a:xfrm>
+            <a:off x="731519" y="2267712"/>
+            <a:ext cx="3657600" cy="1179576"/>
+          </a:xfrm>
+          <a:prstGeom prst="rect">
+            <a:avLst/>
+          </a:prstGeom>
+          <a:noFill/>
+        </p:spPr>
+        <p:txBody>
+          <a:bodyPr wrap="square" lIns="237744" rIns="237744" tIns="237744" bIns="237744">
+            <a:spAutoFit/>
+          </a:bodyPr>
+          <a:lstStyle/>
+          <a:p>
+            <a:pPr>
+              <a:spcAft>
+                <a:spcPts val="144"/>
+              </a:spcAft>
+              <a:defRPr sz="1800" b="0" i="0">
+                <a:solidFill>
+                  <a:srgbClr val="E7E9FF"/>
+                </a:solidFill>
+                <a:latin typeface="Aptos"/>
+              </a:defRPr>
+            </a:pPr>
+            <a:r>
+              <a:t>PowerPoint-native output</a:t>
+            </a:r>
+          </a:p>
+          <a:p>
+            <a:pPr>
+              <a:spcAft>
+                <a:spcPts val="144"/>
+              </a:spcAft>
+              <a:defRPr sz="1800" b="0" i="0">
+                <a:solidFill>
+                  <a:srgbClr val="E7E9FF"/>
+                </a:solidFill>
+                <a:latin typeface="Aptos"/>
+              </a:defRPr>
+            </a:pPr>
+            <a:r>
+              <a:t>Layout-aware slide planning</a:t>
+            </a:r>
+          </a:p>
+          <a:p>
+            <a:pPr>
+              <a:spcAft>
+                <a:spcPts val="144"/>
+              </a:spcAft>
+              <a:defRPr sz="1800" b="0" i="0">
+                <a:solidFill>
+                  <a:srgbClr val="E7E9FF"/>
+                </a:solidFill>
+                <a:latin typeface="Aptos"/>
+              </a:defRPr>
+            </a:pPr>
+            <a:r>
+              <a:t>Template and remix ready</a:t>
             </a:r>
           </a:p>
         </p:txBody>
@@ -3729,9 +3545,17 @@
   <p:cSld>
     <p:bg>
       <p:bgPr>
-        <a:solidFill>
-          <a:srgbClr val="0A0A28"/>
-        </a:solidFill>
+        <a:gradFill rotWithShape="1">
+          <a:gsLst>
+            <a:gs pos="0">
+              <a:srgbClr val="2C42A2"/>
+            </a:gs>
+            <a:gs pos="100000">
+              <a:srgbClr val="6C2DA4"/>
+            </a:gs>
+          </a:gsLst>
+          <a:lin scaled="0" ang="5400000"/>
+        </a:gradFill>
         <a:effectLst/>
       </p:bgPr>
     </p:bg>
@@ -3742,48 +3566,149 @@
         <p:nvPr/>
       </p:nvGrpSpPr>
       <p:grpSpPr/>
-      <p:sp>
-        <p:nvSpPr>
-          <p:cNvPr id="2" name="Title 1"/>
-          <p:cNvSpPr>
-            <a:spLocks noGrp="1"/>
-          </p:cNvSpPr>
-          <p:nvPr>
-            <p:ph type="title"/>
-          </p:nvPr>
-        </p:nvSpPr>
-        <p:spPr/>
-        <p:txBody>
-          <a:bodyPr/>
-          <a:lstStyle/>
-          <a:p>
-            <a:r>
-              <a:rPr>
-                <a:solidFill>
-                  <a:srgbClr val="0066CC"/>
-                </a:solidFill>
-                <a:latin typeface="Arial"/>
-              </a:rPr>
-              <a:t>计算智能的起源与逻辑奠基 (1950-1980)</a:t>
-            </a:r>
-          </a:p>
-        </p:txBody>
-      </p:sp>
-      <p:sp>
-        <p:nvSpPr>
-          <p:cNvPr id="3" name="Text Placeholder 2"/>
-          <p:cNvSpPr>
-            <a:spLocks noGrp="1"/>
-          </p:cNvSpPr>
-          <p:nvPr>
-            <p:ph type="body" idx="1"/>
-          </p:nvPr>
-        </p:nvSpPr>
-        <p:spPr/>
-        <p:txBody>
-          <a:bodyPr/>
-          <a:lstStyle/>
-          <a:p/>
+      <p:pic>
+        <p:nvPicPr>
+          <p:cNvPr id="2" name="Picture 1" descr="tmpccvljwj6.png"/>
+          <p:cNvPicPr>
+            <a:picLocks noChangeAspect="1"/>
+          </p:cNvPicPr>
+          <p:nvPr/>
+        </p:nvPicPr>
+        <p:blipFill>
+          <a:blip r:embed="rId2"/>
+          <a:stretch>
+            <a:fillRect/>
+          </a:stretch>
+        </p:blipFill>
+        <p:spPr>
+          <a:xfrm>
+            <a:off x="0" y="0"/>
+            <a:ext cx="9144000" cy="6858000"/>
+          </a:xfrm>
+          <a:prstGeom prst="rect">
+            <a:avLst/>
+          </a:prstGeom>
+        </p:spPr>
+      </p:pic>
+      <p:sp>
+        <p:nvSpPr>
+          <p:cNvPr id="3" name="Rectangle 2"/>
+          <p:cNvSpPr/>
+          <p:nvPr/>
+        </p:nvSpPr>
+        <p:spPr>
+          <a:xfrm>
+            <a:off x="0" y="0"/>
+            <a:ext cx="9144000" cy="6858000"/>
+          </a:xfrm>
+          <a:prstGeom prst="rect">
+            <a:avLst/>
+          </a:prstGeom>
+          <a:solidFill>
+            <a:srgbClr val="080C12"/>
+          </a:solidFill>
+          <a:ln>
+            <a:noFill/>
+          </a:ln>
+        </p:spPr>
+        <p:style>
+          <a:lnRef idx="1">
+            <a:schemeClr val="accent1"/>
+          </a:lnRef>
+          <a:fillRef idx="3">
+            <a:schemeClr val="accent1"/>
+          </a:fillRef>
+          <a:effectRef idx="2">
+            <a:schemeClr val="accent1"/>
+          </a:effectRef>
+          <a:fontRef idx="minor">
+            <a:schemeClr val="lt1"/>
+          </a:fontRef>
+        </p:style>
+        <p:txBody>
+          <a:bodyPr rtlCol="0" anchor="ctr"/>
+          <a:lstStyle/>
+          <a:p>
+            <a:pPr algn="ctr"/>
+          </a:p>
+        </p:txBody>
+      </p:sp>
+      <p:sp>
+        <p:nvSpPr>
+          <p:cNvPr id="4" name="TextBox 3"/>
+          <p:cNvSpPr txBox="1"/>
+          <p:nvPr/>
+        </p:nvSpPr>
+        <p:spPr>
+          <a:xfrm>
+            <a:off x="640080" y="4389120"/>
+            <a:ext cx="7863840" cy="1097280"/>
+          </a:xfrm>
+          <a:prstGeom prst="rect">
+            <a:avLst/>
+          </a:prstGeom>
+          <a:noFill/>
+        </p:spPr>
+        <p:txBody>
+          <a:bodyPr wrap="square" lIns="237744" rIns="237744" tIns="237744" bIns="237744">
+            <a:spAutoFit/>
+          </a:bodyPr>
+          <a:lstStyle/>
+          <a:p>
+            <a:pPr>
+              <a:spcAft>
+                <a:spcPts val="552"/>
+              </a:spcAft>
+              <a:defRPr sz="4600" b="1" i="0">
+                <a:solidFill>
+                  <a:srgbClr val="FFFFFF"/>
+                </a:solidFill>
+                <a:latin typeface="Aptos Display"/>
+              </a:defRPr>
+            </a:pPr>
+            <a:r>
+              <a:t>平台化时代的 AI 界面</a:t>
+            </a:r>
+          </a:p>
+        </p:txBody>
+      </p:sp>
+      <p:sp>
+        <p:nvSpPr>
+          <p:cNvPr id="5" name="TextBox 4"/>
+          <p:cNvSpPr txBox="1"/>
+          <p:nvPr/>
+        </p:nvSpPr>
+        <p:spPr>
+          <a:xfrm>
+            <a:off x="640080" y="6144768"/>
+            <a:ext cx="7863840" cy="274320"/>
+          </a:xfrm>
+          <a:prstGeom prst="rect">
+            <a:avLst/>
+          </a:prstGeom>
+          <a:noFill/>
+        </p:spPr>
+        <p:txBody>
+          <a:bodyPr wrap="square" lIns="237744" rIns="237744" tIns="237744" bIns="237744">
+            <a:spAutoFit/>
+          </a:bodyPr>
+          <a:lstStyle/>
+          <a:p>
+            <a:pPr>
+              <a:spcAft>
+                <a:spcPts val="144"/>
+              </a:spcAft>
+              <a:defRPr sz="1200" b="0" i="0">
+                <a:solidFill>
+                  <a:srgbClr val="F4F7FA"/>
+                </a:solidFill>
+                <a:latin typeface="Aptos"/>
+              </a:defRPr>
+            </a:pPr>
+            <a:r>
+              <a:t>高保真视觉页，强调未来感与系统规模</a:t>
+            </a:r>
+          </a:p>
         </p:txBody>
       </p:sp>
     </p:spTree>
@@ -3799,9 +3724,17 @@
   <p:cSld>
     <p:bg>
       <p:bgPr>
-        <a:solidFill>
-          <a:srgbClr val="0A0A28"/>
-        </a:solidFill>
+        <a:gradFill rotWithShape="1">
+          <a:gsLst>
+            <a:gs pos="0">
+              <a:srgbClr val="2C42A2"/>
+            </a:gs>
+            <a:gs pos="100000">
+              <a:srgbClr val="6C2DA4"/>
+            </a:gs>
+          </a:gsLst>
+          <a:lin scaled="0" ang="5400000"/>
+        </a:gradFill>
         <a:effectLst/>
       </p:bgPr>
     </p:bg>
@@ -3814,92 +3747,451 @@
       <p:grpSpPr/>
       <p:sp>
         <p:nvSpPr>
-          <p:cNvPr id="2" name="Title 1"/>
-          <p:cNvSpPr>
-            <a:spLocks noGrp="1"/>
-          </p:cNvSpPr>
-          <p:nvPr>
-            <p:ph type="title"/>
-          </p:nvPr>
-        </p:nvSpPr>
-        <p:spPr/>
-        <p:txBody>
-          <a:bodyPr/>
-          <a:lstStyle/>
-          <a:p>
-            <a:r>
-              <a:rPr>
-                <a:solidFill>
-                  <a:srgbClr val="0066CC"/>
-                </a:solidFill>
-                <a:latin typeface="Arial"/>
-              </a:rPr>
-              <a:t>图灵测试与符号 AI 的诞生</a:t>
-            </a:r>
-          </a:p>
-        </p:txBody>
-      </p:sp>
-      <p:sp>
-        <p:nvSpPr>
-          <p:cNvPr id="3" name="Content Placeholder 2"/>
-          <p:cNvSpPr>
-            <a:spLocks noGrp="1"/>
-          </p:cNvSpPr>
-          <p:nvPr>
-            <p:ph idx="1"/>
-          </p:nvPr>
-        </p:nvSpPr>
-        <p:spPr/>
-        <p:txBody>
-          <a:bodyPr wrap="square"/>
-          <a:lstStyle/>
-          <a:p/>
-          <a:p>
-            <a:pPr/>
-            <a:r>
-              <a:rPr>
-                <a:solidFill>
-                  <a:srgbClr val="C8C8FF"/>
-                </a:solidFill>
-                <a:latin typeface="Arial"/>
-              </a:rPr>
-              <a:t>1950年：阿兰·图灵发表《计算机器与智能》，提出著名的“图灵测试” (Turing Test)。</a:t>
-            </a:r>
-          </a:p>
-          <a:p>
-            <a:pPr/>
-            <a:r>
-              <a:rPr>
-                <a:solidFill>
-                  <a:srgbClr val="C8C8FF"/>
-                </a:solidFill>
-                <a:latin typeface="Arial"/>
-              </a:rPr>
-              <a:t>1956年：达特茅斯会议 (Dartmouth Workshop) 正式确立“人工智能”学科，麦卡锡、明斯基等人为学科领袖。</a:t>
-            </a:r>
-          </a:p>
-          <a:p>
-            <a:pPr/>
-            <a:r>
-              <a:rPr>
-                <a:solidFill>
-                  <a:srgbClr val="C8C8FF"/>
-                </a:solidFill>
-                <a:latin typeface="Arial"/>
-              </a:rPr>
-              <a:t>逻辑主义时代：基于规则的专家系统（如 MYCIN）在特定医疗诊断领域取得初步成功。</a:t>
-            </a:r>
-          </a:p>
-          <a:p>
-            <a:pPr/>
-            <a:r>
-              <a:rPr>
-                <a:solidFill>
-                  <a:srgbClr val="C8C8FF"/>
-                </a:solidFill>
-                <a:latin typeface="Arial"/>
-              </a:rPr>
-              <a:t>瓶颈出现：早期 AI 难以处理模糊信息，导致70年代中期进入第一个“AI 冬天”。</a:t>
+          <p:cNvPr id="2" name="TextBox 1"/>
+          <p:cNvSpPr txBox="1"/>
+          <p:nvPr/>
+        </p:nvSpPr>
+        <p:spPr>
+          <a:xfrm>
+            <a:off x="640080" y="411480"/>
+            <a:ext cx="7498079" cy="1645920"/>
+          </a:xfrm>
+          <a:prstGeom prst="rect">
+            <a:avLst/>
+          </a:prstGeom>
+          <a:noFill/>
+        </p:spPr>
+        <p:txBody>
+          <a:bodyPr wrap="square" lIns="237744" rIns="237744" tIns="237744" bIns="237744">
+            <a:spAutoFit/>
+          </a:bodyPr>
+          <a:lstStyle/>
+          <a:p>
+            <a:pPr>
+              <a:spcAft>
+                <a:spcPts val="140"/>
+              </a:spcAft>
+              <a:defRPr sz="2800" b="1" i="0">
+                <a:solidFill>
+                  <a:srgbClr val="FFFFFF"/>
+                </a:solidFill>
+                <a:latin typeface="Aptos Display"/>
+              </a:defRPr>
+            </a:pPr>
+            <a:r>
+              <a:t>平台化速度</a:t>
+            </a:r>
+          </a:p>
+        </p:txBody>
+      </p:sp>
+      <p:sp>
+        <p:nvSpPr>
+          <p:cNvPr id="3" name="Rectangle 2"/>
+          <p:cNvSpPr/>
+          <p:nvPr/>
+        </p:nvSpPr>
+        <p:spPr>
+          <a:xfrm>
+            <a:off x="640080" y="1197863"/>
+            <a:ext cx="1371600" cy="45720"/>
+          </a:xfrm>
+          <a:prstGeom prst="rect">
+            <a:avLst/>
+          </a:prstGeom>
+          <a:solidFill>
+            <a:srgbClr val="4FD8FF"/>
+          </a:solidFill>
+          <a:ln>
+            <a:noFill/>
+          </a:ln>
+        </p:spPr>
+        <p:style>
+          <a:lnRef idx="1">
+            <a:schemeClr val="accent1"/>
+          </a:lnRef>
+          <a:fillRef idx="3">
+            <a:schemeClr val="accent1"/>
+          </a:fillRef>
+          <a:effectRef idx="2">
+            <a:schemeClr val="accent1"/>
+          </a:effectRef>
+          <a:fontRef idx="minor">
+            <a:schemeClr val="lt1"/>
+          </a:fontRef>
+        </p:style>
+        <p:txBody>
+          <a:bodyPr rtlCol="0" anchor="ctr"/>
+          <a:lstStyle/>
+          <a:p>
+            <a:pPr algn="ctr"/>
+          </a:p>
+        </p:txBody>
+      </p:sp>
+      <p:sp>
+        <p:nvSpPr>
+          <p:cNvPr id="4" name="Rounded Rectangle 3"/>
+          <p:cNvSpPr/>
+          <p:nvPr/>
+        </p:nvSpPr>
+        <p:spPr>
+          <a:xfrm>
+            <a:off x="658368" y="2011680"/>
+            <a:ext cx="2462783" cy="1920240"/>
+          </a:xfrm>
+          <a:prstGeom prst="roundRect">
+            <a:avLst/>
+          </a:prstGeom>
+          <a:solidFill>
+            <a:srgbClr val="222A76"/>
+          </a:solidFill>
+          <a:ln w="15875">
+            <a:solidFill>
+              <a:srgbClr val="7C96FF"/>
+            </a:solidFill>
+          </a:ln>
+        </p:spPr>
+        <p:style>
+          <a:lnRef idx="1">
+            <a:schemeClr val="accent1"/>
+          </a:lnRef>
+          <a:fillRef idx="3">
+            <a:schemeClr val="accent1"/>
+          </a:fillRef>
+          <a:effectRef idx="2">
+            <a:schemeClr val="accent1"/>
+          </a:effectRef>
+          <a:fontRef idx="minor">
+            <a:schemeClr val="lt1"/>
+          </a:fontRef>
+        </p:style>
+        <p:txBody>
+          <a:bodyPr rtlCol="0" anchor="ctr"/>
+          <a:lstStyle/>
+          <a:p>
+            <a:pPr algn="ctr"/>
+          </a:p>
+        </p:txBody>
+      </p:sp>
+      <p:sp>
+        <p:nvSpPr>
+          <p:cNvPr id="5" name="TextBox 4"/>
+          <p:cNvSpPr txBox="1"/>
+          <p:nvPr/>
+        </p:nvSpPr>
+        <p:spPr>
+          <a:xfrm>
+            <a:off x="731519" y="2304288"/>
+            <a:ext cx="2316479" cy="731520"/>
+          </a:xfrm>
+          <a:prstGeom prst="rect">
+            <a:avLst/>
+          </a:prstGeom>
+          <a:noFill/>
+        </p:spPr>
+        <p:txBody>
+          <a:bodyPr wrap="square" lIns="237744" rIns="237744" tIns="237744" bIns="237744">
+            <a:spAutoFit/>
+          </a:bodyPr>
+          <a:lstStyle/>
+          <a:p>
+            <a:pPr algn="ctr">
+              <a:spcAft>
+                <a:spcPts val="408"/>
+              </a:spcAft>
+              <a:defRPr sz="3400" b="1" i="0">
+                <a:solidFill>
+                  <a:srgbClr val="4FD8FF"/>
+                </a:solidFill>
+                <a:latin typeface="Aptos Display"/>
+              </a:defRPr>
+            </a:pPr>
+            <a:r>
+              <a:t>78%</a:t>
+            </a:r>
+          </a:p>
+        </p:txBody>
+      </p:sp>
+      <p:sp>
+        <p:nvSpPr>
+          <p:cNvPr id="6" name="TextBox 5"/>
+          <p:cNvSpPr txBox="1"/>
+          <p:nvPr/>
+        </p:nvSpPr>
+        <p:spPr>
+          <a:xfrm>
+            <a:off x="731519" y="3127248"/>
+            <a:ext cx="2316479" cy="640080"/>
+          </a:xfrm>
+          <a:prstGeom prst="rect">
+            <a:avLst/>
+          </a:prstGeom>
+          <a:noFill/>
+        </p:spPr>
+        <p:txBody>
+          <a:bodyPr wrap="square" lIns="237744" rIns="237744" tIns="237744" bIns="237744">
+            <a:spAutoFit/>
+          </a:bodyPr>
+          <a:lstStyle/>
+          <a:p>
+            <a:pPr algn="ctr">
+              <a:spcAft>
+                <a:spcPts val="168"/>
+              </a:spcAft>
+              <a:defRPr sz="1400" b="0" i="0">
+                <a:solidFill>
+                  <a:srgbClr val="E7E9FF"/>
+                </a:solidFill>
+                <a:latin typeface="Aptos"/>
+              </a:defRPr>
+            </a:pPr>
+            <a:r>
+              <a:t>团队已试点</a:t>
+            </a:r>
+          </a:p>
+        </p:txBody>
+      </p:sp>
+      <p:sp>
+        <p:nvSpPr>
+          <p:cNvPr id="7" name="Rounded Rectangle 6"/>
+          <p:cNvSpPr/>
+          <p:nvPr/>
+        </p:nvSpPr>
+        <p:spPr>
+          <a:xfrm>
+            <a:off x="3340607" y="2011680"/>
+            <a:ext cx="2462783" cy="1920240"/>
+          </a:xfrm>
+          <a:prstGeom prst="roundRect">
+            <a:avLst/>
+          </a:prstGeom>
+          <a:solidFill>
+            <a:srgbClr val="222A76"/>
+          </a:solidFill>
+          <a:ln w="15875">
+            <a:solidFill>
+              <a:srgbClr val="7C96FF"/>
+            </a:solidFill>
+          </a:ln>
+        </p:spPr>
+        <p:style>
+          <a:lnRef idx="1">
+            <a:schemeClr val="accent1"/>
+          </a:lnRef>
+          <a:fillRef idx="3">
+            <a:schemeClr val="accent1"/>
+          </a:fillRef>
+          <a:effectRef idx="2">
+            <a:schemeClr val="accent1"/>
+          </a:effectRef>
+          <a:fontRef idx="minor">
+            <a:schemeClr val="lt1"/>
+          </a:fontRef>
+        </p:style>
+        <p:txBody>
+          <a:bodyPr rtlCol="0" anchor="ctr"/>
+          <a:lstStyle/>
+          <a:p>
+            <a:pPr algn="ctr"/>
+          </a:p>
+        </p:txBody>
+      </p:sp>
+      <p:sp>
+        <p:nvSpPr>
+          <p:cNvPr id="8" name="TextBox 7"/>
+          <p:cNvSpPr txBox="1"/>
+          <p:nvPr/>
+        </p:nvSpPr>
+        <p:spPr>
+          <a:xfrm>
+            <a:off x="3413759" y="2304288"/>
+            <a:ext cx="2316479" cy="731520"/>
+          </a:xfrm>
+          <a:prstGeom prst="rect">
+            <a:avLst/>
+          </a:prstGeom>
+          <a:noFill/>
+        </p:spPr>
+        <p:txBody>
+          <a:bodyPr wrap="square" lIns="237744" rIns="237744" tIns="237744" bIns="237744">
+            <a:spAutoFit/>
+          </a:bodyPr>
+          <a:lstStyle/>
+          <a:p>
+            <a:pPr algn="ctr">
+              <a:spcAft>
+                <a:spcPts val="408"/>
+              </a:spcAft>
+              <a:defRPr sz="3400" b="1" i="0">
+                <a:solidFill>
+                  <a:srgbClr val="4FD8FF"/>
+                </a:solidFill>
+                <a:latin typeface="Aptos Display"/>
+              </a:defRPr>
+            </a:pPr>
+            <a:r>
+              <a:t>3x</a:t>
+            </a:r>
+          </a:p>
+        </p:txBody>
+      </p:sp>
+      <p:sp>
+        <p:nvSpPr>
+          <p:cNvPr id="9" name="TextBox 8"/>
+          <p:cNvSpPr txBox="1"/>
+          <p:nvPr/>
+        </p:nvSpPr>
+        <p:spPr>
+          <a:xfrm>
+            <a:off x="3413759" y="3127248"/>
+            <a:ext cx="2316479" cy="640080"/>
+          </a:xfrm>
+          <a:prstGeom prst="rect">
+            <a:avLst/>
+          </a:prstGeom>
+          <a:noFill/>
+        </p:spPr>
+        <p:txBody>
+          <a:bodyPr wrap="square" lIns="237744" rIns="237744" tIns="237744" bIns="237744">
+            <a:spAutoFit/>
+          </a:bodyPr>
+          <a:lstStyle/>
+          <a:p>
+            <a:pPr algn="ctr">
+              <a:spcAft>
+                <a:spcPts val="168"/>
+              </a:spcAft>
+              <a:defRPr sz="1400" b="0" i="0">
+                <a:solidFill>
+                  <a:srgbClr val="E7E9FF"/>
+                </a:solidFill>
+                <a:latin typeface="Aptos"/>
+              </a:defRPr>
+            </a:pPr>
+            <a:r>
+              <a:t>成熟团队交付速度</a:t>
+            </a:r>
+          </a:p>
+        </p:txBody>
+      </p:sp>
+      <p:sp>
+        <p:nvSpPr>
+          <p:cNvPr id="10" name="Rounded Rectangle 9"/>
+          <p:cNvSpPr/>
+          <p:nvPr/>
+        </p:nvSpPr>
+        <p:spPr>
+          <a:xfrm>
+            <a:off x="6022847" y="2011680"/>
+            <a:ext cx="2462783" cy="1920240"/>
+          </a:xfrm>
+          <a:prstGeom prst="roundRect">
+            <a:avLst/>
+          </a:prstGeom>
+          <a:solidFill>
+            <a:srgbClr val="222A76"/>
+          </a:solidFill>
+          <a:ln w="15875">
+            <a:solidFill>
+              <a:srgbClr val="7C96FF"/>
+            </a:solidFill>
+          </a:ln>
+        </p:spPr>
+        <p:style>
+          <a:lnRef idx="1">
+            <a:schemeClr val="accent1"/>
+          </a:lnRef>
+          <a:fillRef idx="3">
+            <a:schemeClr val="accent1"/>
+          </a:fillRef>
+          <a:effectRef idx="2">
+            <a:schemeClr val="accent1"/>
+          </a:effectRef>
+          <a:fontRef idx="minor">
+            <a:schemeClr val="lt1"/>
+          </a:fontRef>
+        </p:style>
+        <p:txBody>
+          <a:bodyPr rtlCol="0" anchor="ctr"/>
+          <a:lstStyle/>
+          <a:p>
+            <a:pPr algn="ctr"/>
+          </a:p>
+        </p:txBody>
+      </p:sp>
+      <p:sp>
+        <p:nvSpPr>
+          <p:cNvPr id="11" name="TextBox 10"/>
+          <p:cNvSpPr txBox="1"/>
+          <p:nvPr/>
+        </p:nvSpPr>
+        <p:spPr>
+          <a:xfrm>
+            <a:off x="6095999" y="2304288"/>
+            <a:ext cx="2316479" cy="731520"/>
+          </a:xfrm>
+          <a:prstGeom prst="rect">
+            <a:avLst/>
+          </a:prstGeom>
+          <a:noFill/>
+        </p:spPr>
+        <p:txBody>
+          <a:bodyPr wrap="square" lIns="237744" rIns="237744" tIns="237744" bIns="237744">
+            <a:spAutoFit/>
+          </a:bodyPr>
+          <a:lstStyle/>
+          <a:p>
+            <a:pPr algn="ctr">
+              <a:spcAft>
+                <a:spcPts val="408"/>
+              </a:spcAft>
+              <a:defRPr sz="3400" b="1" i="0">
+                <a:solidFill>
+                  <a:srgbClr val="4FD8FF"/>
+                </a:solidFill>
+                <a:latin typeface="Aptos Display"/>
+              </a:defRPr>
+            </a:pPr>
+            <a:r>
+              <a:t>24 个月</a:t>
+            </a:r>
+          </a:p>
+        </p:txBody>
+      </p:sp>
+      <p:sp>
+        <p:nvSpPr>
+          <p:cNvPr id="12" name="TextBox 11"/>
+          <p:cNvSpPr txBox="1"/>
+          <p:nvPr/>
+        </p:nvSpPr>
+        <p:spPr>
+          <a:xfrm>
+            <a:off x="6095999" y="3127248"/>
+            <a:ext cx="2316479" cy="640080"/>
+          </a:xfrm>
+          <a:prstGeom prst="rect">
+            <a:avLst/>
+          </a:prstGeom>
+          <a:noFill/>
+        </p:spPr>
+        <p:txBody>
+          <a:bodyPr wrap="square" lIns="237744" rIns="237744" tIns="237744" bIns="237744">
+            <a:spAutoFit/>
+          </a:bodyPr>
+          <a:lstStyle/>
+          <a:p>
+            <a:pPr algn="ctr">
+              <a:spcAft>
+                <a:spcPts val="168"/>
+              </a:spcAft>
+              <a:defRPr sz="1400" b="0" i="0">
+                <a:solidFill>
+                  <a:srgbClr val="E7E9FF"/>
+                </a:solidFill>
+                <a:latin typeface="Aptos"/>
+              </a:defRPr>
+            </a:pPr>
+            <a:r>
+              <a:t>重构窗口</a:t>
             </a:r>
           </a:p>
         </p:txBody>
@@ -3917,9 +4209,17 @@
   <p:cSld>
     <p:bg>
       <p:bgPr>
-        <a:solidFill>
-          <a:srgbClr val="0A0A28"/>
-        </a:solidFill>
+        <a:gradFill rotWithShape="1">
+          <a:gsLst>
+            <a:gs pos="0">
+              <a:srgbClr val="2C42A2"/>
+            </a:gs>
+            <a:gs pos="100000">
+              <a:srgbClr val="6C2DA4"/>
+            </a:gs>
+          </a:gsLst>
+          <a:lin scaled="0" ang="5400000"/>
+        </a:gradFill>
         <a:effectLst/>
       </p:bgPr>
     </p:bg>
@@ -3932,96 +4232,271 @@
       <p:grpSpPr/>
       <p:sp>
         <p:nvSpPr>
-          <p:cNvPr id="2" name="Title 1"/>
-          <p:cNvSpPr>
-            <a:spLocks noGrp="1"/>
-          </p:cNvSpPr>
-          <p:nvPr>
-            <p:ph type="title"/>
-          </p:nvPr>
-        </p:nvSpPr>
-        <p:spPr/>
-        <p:txBody>
-          <a:bodyPr/>
-          <a:lstStyle/>
-          <a:p>
-            <a:r>
-              <a:rPr>
-                <a:solidFill>
-                  <a:srgbClr val="0066CC"/>
-                </a:solidFill>
-                <a:latin typeface="Arial"/>
-              </a:rPr>
-              <a:t>联结主义与神经网络的复兴</a:t>
-            </a:r>
-          </a:p>
-        </p:txBody>
-      </p:sp>
-      <p:sp>
-        <p:nvSpPr>
-          <p:cNvPr id="3" name="Content Placeholder 2"/>
-          <p:cNvSpPr>
-            <a:spLocks noGrp="1"/>
-          </p:cNvSpPr>
-          <p:nvPr>
-            <p:ph idx="1"/>
-          </p:nvPr>
-        </p:nvSpPr>
-        <p:spPr/>
-        <p:txBody>
-          <a:bodyPr wrap="square"/>
-          <a:lstStyle/>
-          <a:p/>
-          <a:p>
-            <a:pPr/>
-            <a:r>
-              <a:rPr>
-                <a:solidFill>
-                  <a:srgbClr val="C8C8FF"/>
-                </a:solidFill>
-                <a:latin typeface="Arial"/>
-              </a:rPr>
-              <a:t>1986年：Rumelhart 提出反向传播算法 (Backpropagation)，解决了多层感知器的训练难题。</a:t>
-            </a:r>
-          </a:p>
-          <a:p>
-            <a:pPr/>
-            <a:r>
-              <a:rPr>
-                <a:solidFill>
-                  <a:srgbClr val="C8C8FF"/>
-                </a:solidFill>
-                <a:latin typeface="Arial"/>
-              </a:rPr>
-              <a:t>统计学习方法崛起：SVM 与随机森林在90年代成为机器学习的主流工具。</a:t>
-            </a:r>
-          </a:p>
-          <a:p>
-            <a:pPr/>
-            <a:r>
-              <a:rPr>
-                <a:solidFill>
-                  <a:srgbClr val="C8C8FF"/>
-                </a:solidFill>
-                <a:latin typeface="Arial"/>
-              </a:rPr>
-              <a:t>GPU 计算能力的增强：为复杂的矩阵运算提供了硬件基础，神经网络的研究重心逐渐转向深度化。</a:t>
-            </a:r>
-          </a:p>
-          <a:p>
-            <a:pPr/>
-            <a:r>
-              <a:rPr>
-                <a:solidFill>
-                  <a:srgbClr val="C8C8FF"/>
-                </a:solidFill>
-                <a:latin typeface="Arial"/>
-              </a:rPr>
-              <a:t>循环神经网络 (RNN) 与 LSTM：在高盛等金融机构及自然语言处理中开始显露头角。</a:t>
-            </a:r>
-          </a:p>
-        </p:txBody>
-      </p:sp>
+          <p:cNvPr id="2" name="TextBox 1"/>
+          <p:cNvSpPr txBox="1"/>
+          <p:nvPr/>
+        </p:nvSpPr>
+        <p:spPr>
+          <a:xfrm>
+            <a:off x="640080" y="411480"/>
+            <a:ext cx="7498079" cy="1645920"/>
+          </a:xfrm>
+          <a:prstGeom prst="rect">
+            <a:avLst/>
+          </a:prstGeom>
+          <a:noFill/>
+        </p:spPr>
+        <p:txBody>
+          <a:bodyPr wrap="square" lIns="237744" rIns="237744" tIns="237744" bIns="237744">
+            <a:spAutoFit/>
+          </a:bodyPr>
+          <a:lstStyle/>
+          <a:p>
+            <a:pPr>
+              <a:spcAft>
+                <a:spcPts val="140"/>
+              </a:spcAft>
+              <a:defRPr sz="2800" b="1" i="0">
+                <a:solidFill>
+                  <a:srgbClr val="FFFFFF"/>
+                </a:solidFill>
+                <a:latin typeface="Aptos Display"/>
+              </a:defRPr>
+            </a:pPr>
+            <a:r>
+              <a:t>真正变化的不是模型，而是工作流</a:t>
+            </a:r>
+          </a:p>
+        </p:txBody>
+      </p:sp>
+      <p:sp>
+        <p:nvSpPr>
+          <p:cNvPr id="3" name="Rectangle 2"/>
+          <p:cNvSpPr/>
+          <p:nvPr/>
+        </p:nvSpPr>
+        <p:spPr>
+          <a:xfrm>
+            <a:off x="640080" y="1197863"/>
+            <a:ext cx="1371600" cy="45720"/>
+          </a:xfrm>
+          <a:prstGeom prst="rect">
+            <a:avLst/>
+          </a:prstGeom>
+          <a:solidFill>
+            <a:srgbClr val="4FD8FF"/>
+          </a:solidFill>
+          <a:ln>
+            <a:noFill/>
+          </a:ln>
+        </p:spPr>
+        <p:style>
+          <a:lnRef idx="1">
+            <a:schemeClr val="accent1"/>
+          </a:lnRef>
+          <a:fillRef idx="3">
+            <a:schemeClr val="accent1"/>
+          </a:fillRef>
+          <a:effectRef idx="2">
+            <a:schemeClr val="accent1"/>
+          </a:effectRef>
+          <a:fontRef idx="minor">
+            <a:schemeClr val="lt1"/>
+          </a:fontRef>
+        </p:style>
+        <p:txBody>
+          <a:bodyPr rtlCol="0" anchor="ctr"/>
+          <a:lstStyle/>
+          <a:p>
+            <a:pPr algn="ctr"/>
+          </a:p>
+        </p:txBody>
+      </p:sp>
+      <p:sp>
+        <p:nvSpPr>
+          <p:cNvPr id="4" name="Rounded Rectangle 3"/>
+          <p:cNvSpPr/>
+          <p:nvPr/>
+        </p:nvSpPr>
+        <p:spPr>
+          <a:xfrm>
+            <a:off x="658368" y="1280160"/>
+            <a:ext cx="4315967" cy="5029200"/>
+          </a:xfrm>
+          <a:prstGeom prst="roundRect">
+            <a:avLst/>
+          </a:prstGeom>
+          <a:solidFill>
+            <a:srgbClr val="222A76"/>
+          </a:solidFill>
+          <a:ln w="15875">
+            <a:solidFill>
+              <a:srgbClr val="7C96FF"/>
+            </a:solidFill>
+          </a:ln>
+        </p:spPr>
+        <p:style>
+          <a:lnRef idx="1">
+            <a:schemeClr val="accent1"/>
+          </a:lnRef>
+          <a:fillRef idx="3">
+            <a:schemeClr val="accent1"/>
+          </a:fillRef>
+          <a:effectRef idx="2">
+            <a:schemeClr val="accent1"/>
+          </a:effectRef>
+          <a:fontRef idx="minor">
+            <a:schemeClr val="lt1"/>
+          </a:fontRef>
+        </p:style>
+        <p:txBody>
+          <a:bodyPr rtlCol="0" anchor="ctr"/>
+          <a:lstStyle/>
+          <a:p>
+            <a:pPr algn="ctr"/>
+          </a:p>
+        </p:txBody>
+      </p:sp>
+      <p:sp>
+        <p:nvSpPr>
+          <p:cNvPr id="5" name="Rounded Rectangle 4"/>
+          <p:cNvSpPr/>
+          <p:nvPr/>
+        </p:nvSpPr>
+        <p:spPr>
+          <a:xfrm>
+            <a:off x="5285231" y="1280160"/>
+            <a:ext cx="3200400" cy="5029200"/>
+          </a:xfrm>
+          <a:prstGeom prst="roundRect">
+            <a:avLst/>
+          </a:prstGeom>
+          <a:solidFill>
+            <a:srgbClr val="222A76"/>
+          </a:solidFill>
+          <a:ln w="15875">
+            <a:solidFill>
+              <a:srgbClr val="7C96FF"/>
+            </a:solidFill>
+          </a:ln>
+        </p:spPr>
+        <p:style>
+          <a:lnRef idx="1">
+            <a:schemeClr val="accent1"/>
+          </a:lnRef>
+          <a:fillRef idx="3">
+            <a:schemeClr val="accent1"/>
+          </a:fillRef>
+          <a:effectRef idx="2">
+            <a:schemeClr val="accent1"/>
+          </a:effectRef>
+          <a:fontRef idx="minor">
+            <a:schemeClr val="lt1"/>
+          </a:fontRef>
+        </p:style>
+        <p:txBody>
+          <a:bodyPr rtlCol="0" anchor="ctr"/>
+          <a:lstStyle/>
+          <a:p>
+            <a:pPr algn="ctr"/>
+          </a:p>
+        </p:txBody>
+      </p:sp>
+      <p:sp>
+        <p:nvSpPr>
+          <p:cNvPr id="6" name="TextBox 5"/>
+          <p:cNvSpPr txBox="1"/>
+          <p:nvPr/>
+        </p:nvSpPr>
+        <p:spPr>
+          <a:xfrm>
+            <a:off x="704088" y="1325880"/>
+            <a:ext cx="4224527" cy="4937760"/>
+          </a:xfrm>
+          <a:prstGeom prst="rect">
+            <a:avLst/>
+          </a:prstGeom>
+          <a:noFill/>
+        </p:spPr>
+        <p:txBody>
+          <a:bodyPr wrap="square" lIns="237744" rIns="237744" tIns="237744" bIns="237744">
+            <a:spAutoFit/>
+          </a:bodyPr>
+          <a:lstStyle/>
+          <a:p>
+            <a:pPr>
+              <a:spcAft>
+                <a:spcPts val="180"/>
+              </a:spcAft>
+              <a:defRPr sz="1800" b="0" i="0">
+                <a:solidFill>
+                  <a:srgbClr val="E7E9FF"/>
+                </a:solidFill>
+                <a:latin typeface="Aptos"/>
+              </a:defRPr>
+            </a:pPr>
+            <a:r>
+              <a:t>模型正在变成默认界面。</a:t>
+            </a:r>
+          </a:p>
+          <a:p>
+            <a:pPr>
+              <a:spcAft>
+                <a:spcPts val="180"/>
+              </a:spcAft>
+              <a:defRPr sz="1800" b="0" i="0">
+                <a:solidFill>
+                  <a:srgbClr val="E7E9FF"/>
+                </a:solidFill>
+                <a:latin typeface="Aptos"/>
+              </a:defRPr>
+            </a:pPr>
+            <a:r>
+              <a:t>评测与路由进入主链路。</a:t>
+            </a:r>
+          </a:p>
+          <a:p>
+            <a:pPr>
+              <a:spcAft>
+                <a:spcPts val="180"/>
+              </a:spcAft>
+              <a:defRPr sz="1800" b="0" i="0">
+                <a:solidFill>
+                  <a:srgbClr val="E7E9FF"/>
+                </a:solidFill>
+                <a:latin typeface="Aptos"/>
+              </a:defRPr>
+            </a:pPr>
+            <a:r>
+              <a:t>治理比参数更先决定 ROI。</a:t>
+            </a:r>
+          </a:p>
+        </p:txBody>
+      </p:sp>
+      <p:pic>
+        <p:nvPicPr>
+          <p:cNvPr id="7" name="Picture 6" descr="tmpcvrgpc7f.png"/>
+          <p:cNvPicPr>
+            <a:picLocks noChangeAspect="1"/>
+          </p:cNvPicPr>
+          <p:nvPr/>
+        </p:nvPicPr>
+        <p:blipFill>
+          <a:blip r:embed="rId2"/>
+          <a:stretch>
+            <a:fillRect/>
+          </a:stretch>
+        </p:blipFill>
+        <p:spPr>
+          <a:xfrm>
+            <a:off x="5285231" y="1280160"/>
+            <a:ext cx="3200400" cy="5029200"/>
+          </a:xfrm>
+          <a:prstGeom prst="rect">
+            <a:avLst/>
+          </a:prstGeom>
+        </p:spPr>
+      </p:pic>
     </p:spTree>
   </p:cSld>
   <p:clrMapOvr>
@@ -4035,9 +4510,17 @@
   <p:cSld>
     <p:bg>
       <p:bgPr>
-        <a:solidFill>
-          <a:srgbClr val="0A0A28"/>
-        </a:solidFill>
+        <a:gradFill rotWithShape="1">
+          <a:gsLst>
+            <a:gs pos="0">
+              <a:srgbClr val="2C42A2"/>
+            </a:gs>
+            <a:gs pos="100000">
+              <a:srgbClr val="6C2DA4"/>
+            </a:gs>
+          </a:gsLst>
+          <a:lin scaled="0" ang="5400000"/>
+        </a:gradFill>
         <a:effectLst/>
       </p:bgPr>
     </p:bg>
@@ -4050,46 +4533,394 @@
       <p:grpSpPr/>
       <p:sp>
         <p:nvSpPr>
-          <p:cNvPr id="2" name="Title 1"/>
-          <p:cNvSpPr>
-            <a:spLocks noGrp="1"/>
-          </p:cNvSpPr>
-          <p:nvPr>
-            <p:ph type="title"/>
-          </p:nvPr>
-        </p:nvSpPr>
-        <p:spPr/>
-        <p:txBody>
-          <a:bodyPr/>
-          <a:lstStyle/>
-          <a:p>
-            <a:r>
-              <a:rPr>
-                <a:solidFill>
-                  <a:srgbClr val="0066CC"/>
-                </a:solidFill>
-                <a:latin typeface="Arial"/>
-              </a:rPr>
-              <a:t>深度学习革命与大模型时代 (2012-Present)</a:t>
-            </a:r>
-          </a:p>
-        </p:txBody>
-      </p:sp>
-      <p:sp>
-        <p:nvSpPr>
-          <p:cNvPr id="3" name="Text Placeholder 2"/>
-          <p:cNvSpPr>
-            <a:spLocks noGrp="1"/>
-          </p:cNvSpPr>
-          <p:nvPr>
-            <p:ph type="body" idx="1"/>
-          </p:nvPr>
-        </p:nvSpPr>
-        <p:spPr/>
-        <p:txBody>
-          <a:bodyPr/>
-          <a:lstStyle/>
-          <a:p/>
+          <p:cNvPr id="2" name="TextBox 1"/>
+          <p:cNvSpPr txBox="1"/>
+          <p:nvPr/>
+        </p:nvSpPr>
+        <p:spPr>
+          <a:xfrm>
+            <a:off x="640080" y="411480"/>
+            <a:ext cx="7498079" cy="1645920"/>
+          </a:xfrm>
+          <a:prstGeom prst="rect">
+            <a:avLst/>
+          </a:prstGeom>
+          <a:noFill/>
+        </p:spPr>
+        <p:txBody>
+          <a:bodyPr wrap="square" lIns="237744" rIns="237744" tIns="237744" bIns="237744">
+            <a:spAutoFit/>
+          </a:bodyPr>
+          <a:lstStyle/>
+          <a:p>
+            <a:pPr>
+              <a:spcAft>
+                <a:spcPts val="140"/>
+              </a:spcAft>
+              <a:defRPr sz="2800" b="1" i="0">
+                <a:solidFill>
+                  <a:srgbClr val="FFFFFF"/>
+                </a:solidFill>
+                <a:latin typeface="Aptos Display"/>
+              </a:defRPr>
+            </a:pPr>
+            <a:r>
+              <a:t>局部工具 vs 平台能力</a:t>
+            </a:r>
+          </a:p>
+        </p:txBody>
+      </p:sp>
+      <p:sp>
+        <p:nvSpPr>
+          <p:cNvPr id="3" name="Rectangle 2"/>
+          <p:cNvSpPr/>
+          <p:nvPr/>
+        </p:nvSpPr>
+        <p:spPr>
+          <a:xfrm>
+            <a:off x="640080" y="1197863"/>
+            <a:ext cx="1371600" cy="45720"/>
+          </a:xfrm>
+          <a:prstGeom prst="rect">
+            <a:avLst/>
+          </a:prstGeom>
+          <a:solidFill>
+            <a:srgbClr val="4FD8FF"/>
+          </a:solidFill>
+          <a:ln>
+            <a:noFill/>
+          </a:ln>
+        </p:spPr>
+        <p:style>
+          <a:lnRef idx="1">
+            <a:schemeClr val="accent1"/>
+          </a:lnRef>
+          <a:fillRef idx="3">
+            <a:schemeClr val="accent1"/>
+          </a:fillRef>
+          <a:effectRef idx="2">
+            <a:schemeClr val="accent1"/>
+          </a:effectRef>
+          <a:fontRef idx="minor">
+            <a:schemeClr val="lt1"/>
+          </a:fontRef>
+        </p:style>
+        <p:txBody>
+          <a:bodyPr rtlCol="0" anchor="ctr"/>
+          <a:lstStyle/>
+          <a:p>
+            <a:pPr algn="ctr"/>
+          </a:p>
+        </p:txBody>
+      </p:sp>
+      <p:sp>
+        <p:nvSpPr>
+          <p:cNvPr id="4" name="Rounded Rectangle 3"/>
+          <p:cNvSpPr/>
+          <p:nvPr/>
+        </p:nvSpPr>
+        <p:spPr>
+          <a:xfrm>
+            <a:off x="658368" y="1280160"/>
+            <a:ext cx="3758183" cy="5029200"/>
+          </a:xfrm>
+          <a:prstGeom prst="roundRect">
+            <a:avLst/>
+          </a:prstGeom>
+          <a:solidFill>
+            <a:srgbClr val="222A76"/>
+          </a:solidFill>
+          <a:ln w="15875">
+            <a:solidFill>
+              <a:srgbClr val="7C96FF"/>
+            </a:solidFill>
+          </a:ln>
+        </p:spPr>
+        <p:style>
+          <a:lnRef idx="1">
+            <a:schemeClr val="accent1"/>
+          </a:lnRef>
+          <a:fillRef idx="3">
+            <a:schemeClr val="accent1"/>
+          </a:fillRef>
+          <a:effectRef idx="2">
+            <a:schemeClr val="accent1"/>
+          </a:effectRef>
+          <a:fontRef idx="minor">
+            <a:schemeClr val="lt1"/>
+          </a:fontRef>
+        </p:style>
+        <p:txBody>
+          <a:bodyPr rtlCol="0" anchor="ctr"/>
+          <a:lstStyle/>
+          <a:p>
+            <a:pPr algn="ctr"/>
+          </a:p>
+        </p:txBody>
+      </p:sp>
+      <p:sp>
+        <p:nvSpPr>
+          <p:cNvPr id="5" name="Rounded Rectangle 4"/>
+          <p:cNvSpPr/>
+          <p:nvPr/>
+        </p:nvSpPr>
+        <p:spPr>
+          <a:xfrm>
+            <a:off x="4727447" y="1280160"/>
+            <a:ext cx="3758183" cy="5029200"/>
+          </a:xfrm>
+          <a:prstGeom prst="roundRect">
+            <a:avLst/>
+          </a:prstGeom>
+          <a:solidFill>
+            <a:srgbClr val="222A76"/>
+          </a:solidFill>
+          <a:ln w="15875">
+            <a:solidFill>
+              <a:srgbClr val="7C96FF"/>
+            </a:solidFill>
+          </a:ln>
+        </p:spPr>
+        <p:style>
+          <a:lnRef idx="1">
+            <a:schemeClr val="accent1"/>
+          </a:lnRef>
+          <a:fillRef idx="3">
+            <a:schemeClr val="accent1"/>
+          </a:fillRef>
+          <a:effectRef idx="2">
+            <a:schemeClr val="accent1"/>
+          </a:effectRef>
+          <a:fontRef idx="minor">
+            <a:schemeClr val="lt1"/>
+          </a:fontRef>
+        </p:style>
+        <p:txBody>
+          <a:bodyPr rtlCol="0" anchor="ctr"/>
+          <a:lstStyle/>
+          <a:p>
+            <a:pPr algn="ctr"/>
+          </a:p>
+        </p:txBody>
+      </p:sp>
+      <p:sp>
+        <p:nvSpPr>
+          <p:cNvPr id="6" name="TextBox 5"/>
+          <p:cNvSpPr txBox="1"/>
+          <p:nvPr/>
+        </p:nvSpPr>
+        <p:spPr>
+          <a:xfrm>
+            <a:off x="731519" y="1353312"/>
+            <a:ext cx="3611879" cy="411480"/>
+          </a:xfrm>
+          <a:prstGeom prst="rect">
+            <a:avLst/>
+          </a:prstGeom>
+          <a:noFill/>
+        </p:spPr>
+        <p:txBody>
+          <a:bodyPr wrap="square" lIns="237744" rIns="237744" tIns="237744" bIns="237744">
+            <a:spAutoFit/>
+          </a:bodyPr>
+          <a:lstStyle/>
+          <a:p>
+            <a:pPr>
+              <a:spcAft>
+                <a:spcPts val="216"/>
+              </a:spcAft>
+              <a:defRPr sz="1800" b="1" i="0">
+                <a:solidFill>
+                  <a:srgbClr val="4FD8FF"/>
+                </a:solidFill>
+                <a:latin typeface="Aptos"/>
+              </a:defRPr>
+            </a:pPr>
+            <a:r>
+              <a:t>局部工具</a:t>
+            </a:r>
+          </a:p>
+        </p:txBody>
+      </p:sp>
+      <p:sp>
+        <p:nvSpPr>
+          <p:cNvPr id="7" name="TextBox 6"/>
+          <p:cNvSpPr txBox="1"/>
+          <p:nvPr/>
+        </p:nvSpPr>
+        <p:spPr>
+          <a:xfrm>
+            <a:off x="4800599" y="1353312"/>
+            <a:ext cx="3611879" cy="411480"/>
+          </a:xfrm>
+          <a:prstGeom prst="rect">
+            <a:avLst/>
+          </a:prstGeom>
+          <a:noFill/>
+        </p:spPr>
+        <p:txBody>
+          <a:bodyPr wrap="square" lIns="237744" rIns="237744" tIns="237744" bIns="237744">
+            <a:spAutoFit/>
+          </a:bodyPr>
+          <a:lstStyle/>
+          <a:p>
+            <a:pPr>
+              <a:spcAft>
+                <a:spcPts val="216"/>
+              </a:spcAft>
+              <a:defRPr sz="1800" b="1" i="0">
+                <a:solidFill>
+                  <a:srgbClr val="4FD8FF"/>
+                </a:solidFill>
+                <a:latin typeface="Aptos"/>
+              </a:defRPr>
+            </a:pPr>
+            <a:r>
+              <a:t>平台能力</a:t>
+            </a:r>
+          </a:p>
+        </p:txBody>
+      </p:sp>
+      <p:sp>
+        <p:nvSpPr>
+          <p:cNvPr id="8" name="TextBox 7"/>
+          <p:cNvSpPr txBox="1"/>
+          <p:nvPr/>
+        </p:nvSpPr>
+        <p:spPr>
+          <a:xfrm>
+            <a:off x="731519" y="1810512"/>
+            <a:ext cx="3611879" cy="4425696"/>
+          </a:xfrm>
+          <a:prstGeom prst="rect">
+            <a:avLst/>
+          </a:prstGeom>
+          <a:noFill/>
+        </p:spPr>
+        <p:txBody>
+          <a:bodyPr wrap="square" lIns="237744" rIns="237744" tIns="237744" bIns="237744">
+            <a:spAutoFit/>
+          </a:bodyPr>
+          <a:lstStyle/>
+          <a:p>
+            <a:pPr>
+              <a:spcAft>
+                <a:spcPts val="180"/>
+              </a:spcAft>
+              <a:defRPr sz="1800" b="0" i="0">
+                <a:solidFill>
+                  <a:srgbClr val="E7E9FF"/>
+                </a:solidFill>
+                <a:latin typeface="Aptos"/>
+              </a:defRPr>
+            </a:pPr>
+            <a:r>
+              <a:t>单点提效</a:t>
+            </a:r>
+          </a:p>
+          <a:p>
+            <a:pPr>
+              <a:spcAft>
+                <a:spcPts val="180"/>
+              </a:spcAft>
+              <a:defRPr sz="1800" b="0" i="0">
+                <a:solidFill>
+                  <a:srgbClr val="E7E9FF"/>
+                </a:solidFill>
+                <a:latin typeface="Aptos"/>
+              </a:defRPr>
+            </a:pPr>
+            <a:r>
+              <a:t>接口重复</a:t>
+            </a:r>
+          </a:p>
+          <a:p>
+            <a:pPr>
+              <a:spcAft>
+                <a:spcPts val="180"/>
+              </a:spcAft>
+              <a:defRPr sz="1800" b="0" i="0">
+                <a:solidFill>
+                  <a:srgbClr val="E7E9FF"/>
+                </a:solidFill>
+                <a:latin typeface="Aptos"/>
+              </a:defRPr>
+            </a:pPr>
+            <a:r>
+              <a:t>质量波动大</a:t>
+            </a:r>
+          </a:p>
+        </p:txBody>
+      </p:sp>
+      <p:sp>
+        <p:nvSpPr>
+          <p:cNvPr id="9" name="TextBox 8"/>
+          <p:cNvSpPr txBox="1"/>
+          <p:nvPr/>
+        </p:nvSpPr>
+        <p:spPr>
+          <a:xfrm>
+            <a:off x="4800599" y="1810512"/>
+            <a:ext cx="3611879" cy="4425696"/>
+          </a:xfrm>
+          <a:prstGeom prst="rect">
+            <a:avLst/>
+          </a:prstGeom>
+          <a:noFill/>
+        </p:spPr>
+        <p:txBody>
+          <a:bodyPr wrap="square" lIns="237744" rIns="237744" tIns="237744" bIns="237744">
+            <a:spAutoFit/>
+          </a:bodyPr>
+          <a:lstStyle/>
+          <a:p>
+            <a:pPr>
+              <a:spcAft>
+                <a:spcPts val="180"/>
+              </a:spcAft>
+              <a:defRPr sz="1800" b="0" i="0">
+                <a:solidFill>
+                  <a:srgbClr val="E7E9FF"/>
+                </a:solidFill>
+                <a:latin typeface="Aptos"/>
+              </a:defRPr>
+            </a:pPr>
+            <a:r>
+              <a:t>统一路由</a:t>
+            </a:r>
+          </a:p>
+          <a:p>
+            <a:pPr>
+              <a:spcAft>
+                <a:spcPts val="180"/>
+              </a:spcAft>
+              <a:defRPr sz="1800" b="0" i="0">
+                <a:solidFill>
+                  <a:srgbClr val="E7E9FF"/>
+                </a:solidFill>
+                <a:latin typeface="Aptos"/>
+              </a:defRPr>
+            </a:pPr>
+            <a:r>
+              <a:t>共享知识层</a:t>
+            </a:r>
+          </a:p>
+          <a:p>
+            <a:pPr>
+              <a:spcAft>
+                <a:spcPts val="180"/>
+              </a:spcAft>
+              <a:defRPr sz="1800" b="0" i="0">
+                <a:solidFill>
+                  <a:srgbClr val="E7E9FF"/>
+                </a:solidFill>
+                <a:latin typeface="Aptos"/>
+              </a:defRPr>
+            </a:pPr>
+            <a:r>
+              <a:t>上线成本更低</a:t>
+            </a:r>
+          </a:p>
         </p:txBody>
       </p:sp>
     </p:spTree>
@@ -4105,9 +4936,17 @@
   <p:cSld>
     <p:bg>
       <p:bgPr>
-        <a:solidFill>
-          <a:srgbClr val="0A0A28"/>
-        </a:solidFill>
+        <a:gradFill rotWithShape="1">
+          <a:gsLst>
+            <a:gs pos="0">
+              <a:srgbClr val="2C42A2"/>
+            </a:gs>
+            <a:gs pos="100000">
+              <a:srgbClr val="6C2DA4"/>
+            </a:gs>
+          </a:gsLst>
+          <a:lin scaled="0" ang="5400000"/>
+        </a:gradFill>
         <a:effectLst/>
       </p:bgPr>
     </p:bg>
@@ -4120,96 +4959,149 @@
       <p:grpSpPr/>
       <p:sp>
         <p:nvSpPr>
-          <p:cNvPr id="2" name="Title 1"/>
-          <p:cNvSpPr>
-            <a:spLocks noGrp="1"/>
-          </p:cNvSpPr>
-          <p:nvPr>
-            <p:ph type="title"/>
-          </p:nvPr>
-        </p:nvSpPr>
-        <p:spPr/>
-        <p:txBody>
-          <a:bodyPr/>
-          <a:lstStyle/>
-          <a:p>
-            <a:r>
-              <a:rPr>
-                <a:solidFill>
-                  <a:srgbClr val="0066CC"/>
-                </a:solidFill>
-                <a:latin typeface="Arial"/>
-              </a:rPr>
-              <a:t>从 ImageNet 到 Transformer 架构</a:t>
-            </a:r>
-          </a:p>
-        </p:txBody>
-      </p:sp>
-      <p:sp>
-        <p:nvSpPr>
-          <p:cNvPr id="3" name="Content Placeholder 2"/>
-          <p:cNvSpPr>
-            <a:spLocks noGrp="1"/>
-          </p:cNvSpPr>
-          <p:nvPr>
-            <p:ph idx="1"/>
-          </p:nvPr>
-        </p:nvSpPr>
-        <p:spPr/>
-        <p:txBody>
-          <a:bodyPr wrap="square"/>
-          <a:lstStyle/>
-          <a:p/>
-          <a:p>
-            <a:pPr/>
-            <a:r>
-              <a:rPr>
-                <a:solidFill>
-                  <a:srgbClr val="C8C8FF"/>
-                </a:solidFill>
-                <a:latin typeface="Arial"/>
-              </a:rPr>
-              <a:t>2012年：AlexNet 以领先第二名10.8%的优势夺得 ImageNet 冠军，开启深度卷积神经网络时代。</a:t>
-            </a:r>
-          </a:p>
-          <a:p>
-            <a:pPr/>
-            <a:r>
-              <a:rPr>
-                <a:solidFill>
-                  <a:srgbClr val="C8C8FF"/>
-                </a:solidFill>
-                <a:latin typeface="Arial"/>
-              </a:rPr>
-              <a:t>2017年：Google 发表《Attention is All You Need》，提出 Transformer 架构，颠覆序列建模模式。</a:t>
-            </a:r>
-          </a:p>
-          <a:p>
-            <a:pPr/>
-            <a:r>
-              <a:rPr>
-                <a:solidFill>
-                  <a:srgbClr val="C8C8FF"/>
-                </a:solidFill>
-                <a:latin typeface="Arial"/>
-              </a:rPr>
-              <a:t>预训练大模型 (LLMs)：GPT-3 的 1750亿参数规模展示了模型容量与涌现能力 (Emergent Abilities) 的正相关性。</a:t>
-            </a:r>
-          </a:p>
-          <a:p>
-            <a:pPr/>
-            <a:r>
-              <a:rPr>
-                <a:solidFill>
-                  <a:srgbClr val="C8C8FF"/>
-                </a:solidFill>
-                <a:latin typeface="Arial"/>
-              </a:rPr>
-              <a:t>推理与对齐：利用 RLHF (基于人类反馈的强化学习) 解决了模型在道德与逻辑层面的幻觉问题。</a:t>
-            </a:r>
-          </a:p>
-        </p:txBody>
-      </p:sp>
+          <p:cNvPr id="2" name="TextBox 1"/>
+          <p:cNvSpPr txBox="1"/>
+          <p:nvPr/>
+        </p:nvSpPr>
+        <p:spPr>
+          <a:xfrm>
+            <a:off x="640080" y="411480"/>
+            <a:ext cx="7498079" cy="1645920"/>
+          </a:xfrm>
+          <a:prstGeom prst="rect">
+            <a:avLst/>
+          </a:prstGeom>
+          <a:noFill/>
+        </p:spPr>
+        <p:txBody>
+          <a:bodyPr wrap="square" lIns="237744" rIns="237744" tIns="237744" bIns="237744">
+            <a:spAutoFit/>
+          </a:bodyPr>
+          <a:lstStyle/>
+          <a:p>
+            <a:pPr>
+              <a:spcAft>
+                <a:spcPts val="140"/>
+              </a:spcAft>
+              <a:defRPr sz="2800" b="1" i="0">
+                <a:solidFill>
+                  <a:srgbClr val="FFFFFF"/>
+                </a:solidFill>
+                <a:latin typeface="Aptos Display"/>
+              </a:defRPr>
+            </a:pPr>
+            <a:r>
+              <a:t>模型能力曲线</a:t>
+            </a:r>
+          </a:p>
+        </p:txBody>
+      </p:sp>
+      <p:sp>
+        <p:nvSpPr>
+          <p:cNvPr id="3" name="Rectangle 2"/>
+          <p:cNvSpPr/>
+          <p:nvPr/>
+        </p:nvSpPr>
+        <p:spPr>
+          <a:xfrm>
+            <a:off x="640080" y="1197863"/>
+            <a:ext cx="1371600" cy="45720"/>
+          </a:xfrm>
+          <a:prstGeom prst="rect">
+            <a:avLst/>
+          </a:prstGeom>
+          <a:solidFill>
+            <a:srgbClr val="4FD8FF"/>
+          </a:solidFill>
+          <a:ln>
+            <a:noFill/>
+          </a:ln>
+        </p:spPr>
+        <p:style>
+          <a:lnRef idx="1">
+            <a:schemeClr val="accent1"/>
+          </a:lnRef>
+          <a:fillRef idx="3">
+            <a:schemeClr val="accent1"/>
+          </a:fillRef>
+          <a:effectRef idx="2">
+            <a:schemeClr val="accent1"/>
+          </a:effectRef>
+          <a:fontRef idx="minor">
+            <a:schemeClr val="lt1"/>
+          </a:fontRef>
+        </p:style>
+        <p:txBody>
+          <a:bodyPr rtlCol="0" anchor="ctr"/>
+          <a:lstStyle/>
+          <a:p>
+            <a:pPr algn="ctr"/>
+          </a:p>
+        </p:txBody>
+      </p:sp>
+      <p:sp>
+        <p:nvSpPr>
+          <p:cNvPr id="4" name="Rounded Rectangle 3"/>
+          <p:cNvSpPr/>
+          <p:nvPr/>
+        </p:nvSpPr>
+        <p:spPr>
+          <a:xfrm>
+            <a:off x="676656" y="1344168"/>
+            <a:ext cx="7735824" cy="4535424"/>
+          </a:xfrm>
+          <a:prstGeom prst="roundRect">
+            <a:avLst/>
+          </a:prstGeom>
+          <a:solidFill>
+            <a:srgbClr val="222A76"/>
+          </a:solidFill>
+          <a:ln w="15875">
+            <a:solidFill>
+              <a:srgbClr val="7C96FF"/>
+            </a:solidFill>
+          </a:ln>
+        </p:spPr>
+        <p:style>
+          <a:lnRef idx="1">
+            <a:schemeClr val="accent1"/>
+          </a:lnRef>
+          <a:fillRef idx="3">
+            <a:schemeClr val="accent1"/>
+          </a:fillRef>
+          <a:effectRef idx="2">
+            <a:schemeClr val="accent1"/>
+          </a:effectRef>
+          <a:fontRef idx="minor">
+            <a:schemeClr val="lt1"/>
+          </a:fontRef>
+        </p:style>
+        <p:txBody>
+          <a:bodyPr rtlCol="0" anchor="ctr"/>
+          <a:lstStyle/>
+          <a:p>
+            <a:pPr algn="ctr"/>
+          </a:p>
+        </p:txBody>
+      </p:sp>
+      <p:graphicFrame>
+        <p:nvGraphicFramePr>
+          <p:cNvPr id="5" name="Chart 4"/>
+          <p:cNvGraphicFramePr>
+            <a:graphicFrameLocks noGrp="1"/>
+          </p:cNvGraphicFramePr>
+          <p:nvPr/>
+        </p:nvGraphicFramePr>
+        <p:xfrm>
+          <a:off x="749808" y="1417320"/>
+          <a:ext cx="7589520" cy="4389120"/>
+        </p:xfrm>
+        <a:graphic>
+          <a:graphicData uri="http://schemas.openxmlformats.org/drawingml/2006/chart">
+            <c:chart xmlns:c="http://schemas.openxmlformats.org/drawingml/2006/chart" r:id="rId2"/>
+          </a:graphicData>
+        </a:graphic>
+      </p:graphicFrame>
     </p:spTree>
   </p:cSld>
   <p:clrMapOvr>
@@ -4221,6 +5113,22 @@
 <file path=ppt/slides/slide7.xml><?xml version="1.0" encoding="utf-8"?>
 <p:sld xmlns:a="http://schemas.openxmlformats.org/drawingml/2006/main" xmlns:p="http://schemas.openxmlformats.org/presentationml/2006/main" xmlns:r="http://schemas.openxmlformats.org/officeDocument/2006/relationships">
   <p:cSld>
+    <p:bg>
+      <p:bgPr>
+        <a:gradFill rotWithShape="1">
+          <a:gsLst>
+            <a:gs pos="0">
+              <a:srgbClr val="2C42A2"/>
+            </a:gs>
+            <a:gs pos="100000">
+              <a:srgbClr val="6C2DA4"/>
+            </a:gs>
+          </a:gsLst>
+          <a:lin scaled="0" ang="5400000"/>
+        </a:gradFill>
+        <a:effectLst/>
+      </p:bgPr>
+    </p:bg>
     <p:spTree>
       <p:nvGrpSpPr>
         <p:cNvPr id="1" name=""/>
@@ -4230,19 +5138,659 @@
       <p:grpSpPr/>
       <p:sp>
         <p:nvSpPr>
-          <p:cNvPr id="2" name="Title 1"/>
-          <p:cNvSpPr>
-            <a:spLocks noGrp="1"/>
-          </p:cNvSpPr>
-          <p:nvPr>
-            <p:ph type="title"/>
-          </p:nvPr>
-        </p:nvSpPr>
-        <p:spPr/>
-        <p:txBody>
-          <a:bodyPr/>
-          <a:lstStyle/>
-          <a:p>
+          <p:cNvPr id="2" name="TextBox 1"/>
+          <p:cNvSpPr txBox="1"/>
+          <p:nvPr/>
+        </p:nvSpPr>
+        <p:spPr>
+          <a:xfrm>
+            <a:off x="640080" y="411480"/>
+            <a:ext cx="7498079" cy="1645920"/>
+          </a:xfrm>
+          <a:prstGeom prst="rect">
+            <a:avLst/>
+          </a:prstGeom>
+          <a:noFill/>
+        </p:spPr>
+        <p:txBody>
+          <a:bodyPr wrap="square" lIns="237744" rIns="237744" tIns="237744" bIns="237744">
+            <a:spAutoFit/>
+          </a:bodyPr>
+          <a:lstStyle/>
+          <a:p>
+            <a:pPr>
+              <a:spcAft>
+                <a:spcPts val="140"/>
+              </a:spcAft>
+              <a:defRPr sz="2800" b="1" i="0">
+                <a:solidFill>
+                  <a:srgbClr val="FFFFFF"/>
+                </a:solidFill>
+                <a:latin typeface="Aptos Display"/>
+              </a:defRPr>
+            </a:pPr>
+            <a:r>
+              <a:t>企业 AI 操作模型</a:t>
+            </a:r>
+          </a:p>
+        </p:txBody>
+      </p:sp>
+      <p:sp>
+        <p:nvSpPr>
+          <p:cNvPr id="3" name="Rectangle 2"/>
+          <p:cNvSpPr/>
+          <p:nvPr/>
+        </p:nvSpPr>
+        <p:spPr>
+          <a:xfrm>
+            <a:off x="640080" y="1197863"/>
+            <a:ext cx="1371600" cy="45720"/>
+          </a:xfrm>
+          <a:prstGeom prst="rect">
+            <a:avLst/>
+          </a:prstGeom>
+          <a:solidFill>
+            <a:srgbClr val="4FD8FF"/>
+          </a:solidFill>
+          <a:ln>
+            <a:noFill/>
+          </a:ln>
+        </p:spPr>
+        <p:style>
+          <a:lnRef idx="1">
+            <a:schemeClr val="accent1"/>
+          </a:lnRef>
+          <a:fillRef idx="3">
+            <a:schemeClr val="accent1"/>
+          </a:fillRef>
+          <a:effectRef idx="2">
+            <a:schemeClr val="accent1"/>
+          </a:effectRef>
+          <a:fontRef idx="minor">
+            <a:schemeClr val="lt1"/>
+          </a:fontRef>
+        </p:style>
+        <p:txBody>
+          <a:bodyPr rtlCol="0" anchor="ctr"/>
+          <a:lstStyle/>
+          <a:p>
+            <a:pPr algn="ctr"/>
+          </a:p>
+        </p:txBody>
+      </p:sp>
+      <p:sp>
+        <p:nvSpPr>
+          <p:cNvPr id="4" name="Rounded Rectangle 3"/>
+          <p:cNvSpPr/>
+          <p:nvPr/>
+        </p:nvSpPr>
+        <p:spPr>
+          <a:xfrm>
+            <a:off x="658368" y="1280160"/>
+            <a:ext cx="3758183" cy="5029200"/>
+          </a:xfrm>
+          <a:prstGeom prst="roundRect">
+            <a:avLst/>
+          </a:prstGeom>
+          <a:solidFill>
+            <a:srgbClr val="222A76"/>
+          </a:solidFill>
+          <a:ln w="15875">
+            <a:solidFill>
+              <a:srgbClr val="7C96FF"/>
+            </a:solidFill>
+          </a:ln>
+        </p:spPr>
+        <p:style>
+          <a:lnRef idx="1">
+            <a:schemeClr val="accent1"/>
+          </a:lnRef>
+          <a:fillRef idx="3">
+            <a:schemeClr val="accent1"/>
+          </a:fillRef>
+          <a:effectRef idx="2">
+            <a:schemeClr val="accent1"/>
+          </a:effectRef>
+          <a:fontRef idx="minor">
+            <a:schemeClr val="lt1"/>
+          </a:fontRef>
+        </p:style>
+        <p:txBody>
+          <a:bodyPr rtlCol="0" anchor="ctr"/>
+          <a:lstStyle/>
+          <a:p>
+            <a:pPr algn="ctr"/>
+          </a:p>
+        </p:txBody>
+      </p:sp>
+      <p:sp>
+        <p:nvSpPr>
+          <p:cNvPr id="5" name="Rounded Rectangle 4"/>
+          <p:cNvSpPr/>
+          <p:nvPr/>
+        </p:nvSpPr>
+        <p:spPr>
+          <a:xfrm>
+            <a:off x="4727447" y="1280160"/>
+            <a:ext cx="3758183" cy="5029200"/>
+          </a:xfrm>
+          <a:prstGeom prst="roundRect">
+            <a:avLst/>
+          </a:prstGeom>
+          <a:solidFill>
+            <a:srgbClr val="222A76"/>
+          </a:solidFill>
+          <a:ln w="15875">
+            <a:solidFill>
+              <a:srgbClr val="7C96FF"/>
+            </a:solidFill>
+          </a:ln>
+        </p:spPr>
+        <p:style>
+          <a:lnRef idx="1">
+            <a:schemeClr val="accent1"/>
+          </a:lnRef>
+          <a:fillRef idx="3">
+            <a:schemeClr val="accent1"/>
+          </a:fillRef>
+          <a:effectRef idx="2">
+            <a:schemeClr val="accent1"/>
+          </a:effectRef>
+          <a:fontRef idx="minor">
+            <a:schemeClr val="lt1"/>
+          </a:fontRef>
+        </p:style>
+        <p:txBody>
+          <a:bodyPr rtlCol="0" anchor="ctr"/>
+          <a:lstStyle/>
+          <a:p>
+            <a:pPr algn="ctr"/>
+          </a:p>
+        </p:txBody>
+      </p:sp>
+      <p:sp>
+        <p:nvSpPr>
+          <p:cNvPr id="6" name="TextBox 5"/>
+          <p:cNvSpPr txBox="1"/>
+          <p:nvPr/>
+        </p:nvSpPr>
+        <p:spPr>
+          <a:xfrm>
+            <a:off x="731519" y="1353312"/>
+            <a:ext cx="3611879" cy="411480"/>
+          </a:xfrm>
+          <a:prstGeom prst="rect">
+            <a:avLst/>
+          </a:prstGeom>
+          <a:noFill/>
+        </p:spPr>
+        <p:txBody>
+          <a:bodyPr wrap="square" lIns="237744" rIns="237744" tIns="237744" bIns="237744">
+            <a:spAutoFit/>
+          </a:bodyPr>
+          <a:lstStyle/>
+          <a:p>
+            <a:pPr>
+              <a:spcAft>
+                <a:spcPts val="216"/>
+              </a:spcAft>
+              <a:defRPr sz="1800" b="1" i="0">
+                <a:solidFill>
+                  <a:srgbClr val="4FD8FF"/>
+                </a:solidFill>
+                <a:latin typeface="Aptos"/>
+              </a:defRPr>
+            </a:pPr>
+            <a:r>
+              <a:t>建设层</a:t>
+            </a:r>
+          </a:p>
+        </p:txBody>
+      </p:sp>
+      <p:sp>
+        <p:nvSpPr>
+          <p:cNvPr id="7" name="TextBox 6"/>
+          <p:cNvSpPr txBox="1"/>
+          <p:nvPr/>
+        </p:nvSpPr>
+        <p:spPr>
+          <a:xfrm>
+            <a:off x="4800599" y="1353312"/>
+            <a:ext cx="3611879" cy="411480"/>
+          </a:xfrm>
+          <a:prstGeom prst="rect">
+            <a:avLst/>
+          </a:prstGeom>
+          <a:noFill/>
+        </p:spPr>
+        <p:txBody>
+          <a:bodyPr wrap="square" lIns="237744" rIns="237744" tIns="237744" bIns="237744">
+            <a:spAutoFit/>
+          </a:bodyPr>
+          <a:lstStyle/>
+          <a:p>
+            <a:pPr>
+              <a:spcAft>
+                <a:spcPts val="216"/>
+              </a:spcAft>
+              <a:defRPr sz="1800" b="1" i="0">
+                <a:solidFill>
+                  <a:srgbClr val="4FD8FF"/>
+                </a:solidFill>
+                <a:latin typeface="Aptos"/>
+              </a:defRPr>
+            </a:pPr>
+            <a:r>
+              <a:t>控制层</a:t>
+            </a:r>
+          </a:p>
+        </p:txBody>
+      </p:sp>
+      <p:sp>
+        <p:nvSpPr>
+          <p:cNvPr id="8" name="TextBox 7"/>
+          <p:cNvSpPr txBox="1"/>
+          <p:nvPr/>
+        </p:nvSpPr>
+        <p:spPr>
+          <a:xfrm>
+            <a:off x="731519" y="1810512"/>
+            <a:ext cx="3611879" cy="4425696"/>
+          </a:xfrm>
+          <a:prstGeom prst="rect">
+            <a:avLst/>
+          </a:prstGeom>
+          <a:noFill/>
+        </p:spPr>
+        <p:txBody>
+          <a:bodyPr wrap="square" lIns="237744" rIns="237744" tIns="237744" bIns="237744">
+            <a:spAutoFit/>
+          </a:bodyPr>
+          <a:lstStyle/>
+          <a:p>
+            <a:pPr>
+              <a:spcAft>
+                <a:spcPts val="180"/>
+              </a:spcAft>
+              <a:defRPr sz="1800" b="0" i="0">
+                <a:solidFill>
+                  <a:srgbClr val="E7E9FF"/>
+                </a:solidFill>
+                <a:latin typeface="Aptos"/>
+              </a:defRPr>
+            </a:pPr>
+            <a:r>
+              <a:t>模型与编排</a:t>
+            </a:r>
+          </a:p>
+          <a:p>
+            <a:pPr>
+              <a:spcAft>
+                <a:spcPts val="180"/>
+              </a:spcAft>
+              <a:defRPr sz="1800" b="0" i="0">
+                <a:solidFill>
+                  <a:srgbClr val="E7E9FF"/>
+                </a:solidFill>
+                <a:latin typeface="Aptos"/>
+              </a:defRPr>
+            </a:pPr>
+            <a:r>
+              <a:t>检索与工具</a:t>
+            </a:r>
+          </a:p>
+          <a:p>
+            <a:pPr>
+              <a:spcAft>
+                <a:spcPts val="180"/>
+              </a:spcAft>
+              <a:defRPr sz="1800" b="0" i="0">
+                <a:solidFill>
+                  <a:srgbClr val="E7E9FF"/>
+                </a:solidFill>
+                <a:latin typeface="Aptos"/>
+              </a:defRPr>
+            </a:pPr>
+            <a:r>
+              <a:t>反馈与评测</a:t>
+            </a:r>
+          </a:p>
+        </p:txBody>
+      </p:sp>
+      <p:sp>
+        <p:nvSpPr>
+          <p:cNvPr id="9" name="TextBox 8"/>
+          <p:cNvSpPr txBox="1"/>
+          <p:nvPr/>
+        </p:nvSpPr>
+        <p:spPr>
+          <a:xfrm>
+            <a:off x="4800599" y="1810512"/>
+            <a:ext cx="3611879" cy="4425696"/>
+          </a:xfrm>
+          <a:prstGeom prst="rect">
+            <a:avLst/>
+          </a:prstGeom>
+          <a:noFill/>
+        </p:spPr>
+        <p:txBody>
+          <a:bodyPr wrap="square" lIns="237744" rIns="237744" tIns="237744" bIns="237744">
+            <a:spAutoFit/>
+          </a:bodyPr>
+          <a:lstStyle/>
+          <a:p>
+            <a:pPr>
+              <a:spcAft>
+                <a:spcPts val="180"/>
+              </a:spcAft>
+              <a:defRPr sz="1800" b="0" i="0">
+                <a:solidFill>
+                  <a:srgbClr val="E7E9FF"/>
+                </a:solidFill>
+                <a:latin typeface="Aptos"/>
+              </a:defRPr>
+            </a:pPr>
+            <a:r>
+              <a:t>风险分级</a:t>
+            </a:r>
+          </a:p>
+          <a:p>
+            <a:pPr>
+              <a:spcAft>
+                <a:spcPts val="180"/>
+              </a:spcAft>
+              <a:defRPr sz="1800" b="0" i="0">
+                <a:solidFill>
+                  <a:srgbClr val="E7E9FF"/>
+                </a:solidFill>
+                <a:latin typeface="Aptos"/>
+              </a:defRPr>
+            </a:pPr>
+            <a:r>
+              <a:t>预算护栏</a:t>
+            </a:r>
+          </a:p>
+          <a:p>
+            <a:pPr>
+              <a:spcAft>
+                <a:spcPts val="180"/>
+              </a:spcAft>
+              <a:defRPr sz="1800" b="0" i="0">
+                <a:solidFill>
+                  <a:srgbClr val="E7E9FF"/>
+                </a:solidFill>
+                <a:latin typeface="Aptos"/>
+              </a:defRPr>
+            </a:pPr>
+            <a:r>
+              <a:t>业务负责人</a:t>
+            </a:r>
+          </a:p>
+        </p:txBody>
+      </p:sp>
+    </p:spTree>
+  </p:cSld>
+  <p:clrMapOvr>
+    <a:masterClrMapping/>
+  </p:clrMapOvr>
+</p:sld>
+</file>
+
+<file path=ppt/slides/slide8.xml><?xml version="1.0" encoding="utf-8"?>
+<p:sld xmlns:a="http://schemas.openxmlformats.org/drawingml/2006/main" xmlns:p="http://schemas.openxmlformats.org/presentationml/2006/main" xmlns:r="http://schemas.openxmlformats.org/officeDocument/2006/relationships">
+  <p:cSld>
+    <p:bg>
+      <p:bgPr>
+        <a:gradFill rotWithShape="1">
+          <a:gsLst>
+            <a:gs pos="0">
+              <a:srgbClr val="2C42A2"/>
+            </a:gs>
+            <a:gs pos="100000">
+              <a:srgbClr val="6C2DA4"/>
+            </a:gs>
+          </a:gsLst>
+          <a:lin scaled="0" ang="5400000"/>
+        </a:gradFill>
+        <a:effectLst/>
+      </p:bgPr>
+    </p:bg>
+    <p:spTree>
+      <p:nvGrpSpPr>
+        <p:cNvPr id="1" name=""/>
+        <p:cNvGrpSpPr/>
+        <p:nvPr/>
+      </p:nvGrpSpPr>
+      <p:grpSpPr/>
+      <p:sp>
+        <p:nvSpPr>
+          <p:cNvPr id="2" name="Rounded Rectangle 1"/>
+          <p:cNvSpPr/>
+          <p:nvPr/>
+        </p:nvSpPr>
+        <p:spPr>
+          <a:xfrm>
+            <a:off x="914400" y="1097280"/>
+            <a:ext cx="7315200" cy="4389120"/>
+          </a:xfrm>
+          <a:prstGeom prst="roundRect">
+            <a:avLst/>
+          </a:prstGeom>
+          <a:solidFill>
+            <a:srgbClr val="222A76"/>
+          </a:solidFill>
+          <a:ln w="15875">
+            <a:solidFill>
+              <a:srgbClr val="7C96FF"/>
+            </a:solidFill>
+          </a:ln>
+        </p:spPr>
+        <p:style>
+          <a:lnRef idx="1">
+            <a:schemeClr val="accent1"/>
+          </a:lnRef>
+          <a:fillRef idx="3">
+            <a:schemeClr val="accent1"/>
+          </a:fillRef>
+          <a:effectRef idx="2">
+            <a:schemeClr val="accent1"/>
+          </a:effectRef>
+          <a:fontRef idx="minor">
+            <a:schemeClr val="lt1"/>
+          </a:fontRef>
+        </p:style>
+        <p:txBody>
+          <a:bodyPr rtlCol="0" anchor="ctr"/>
+          <a:lstStyle/>
+          <a:p>
+            <a:pPr algn="ctr"/>
+          </a:p>
+        </p:txBody>
+      </p:sp>
+      <p:sp>
+        <p:nvSpPr>
+          <p:cNvPr id="3" name="TextBox 2"/>
+          <p:cNvSpPr txBox="1"/>
+          <p:nvPr/>
+        </p:nvSpPr>
+        <p:spPr>
+          <a:xfrm>
+            <a:off x="1143000" y="1325880"/>
+            <a:ext cx="914400" cy="914400"/>
+          </a:xfrm>
+          <a:prstGeom prst="rect">
+            <a:avLst/>
+          </a:prstGeom>
+          <a:noFill/>
+        </p:spPr>
+        <p:txBody>
+          <a:bodyPr wrap="square" lIns="237744" rIns="237744" tIns="237744" bIns="237744">
+            <a:spAutoFit/>
+          </a:bodyPr>
+          <a:lstStyle/>
+          <a:p>
+            <a:pPr>
+              <a:spcAft>
+                <a:spcPts val="1104"/>
+              </a:spcAft>
+              <a:defRPr sz="9200" b="1" i="0">
+                <a:solidFill>
+                  <a:srgbClr val="4FD8FF"/>
+                </a:solidFill>
+                <a:latin typeface="Aptos Display"/>
+              </a:defRPr>
+            </a:pPr>
+            <a:r>
+              <a:t>“</a:t>
+            </a:r>
+          </a:p>
+        </p:txBody>
+      </p:sp>
+      <p:sp>
+        <p:nvSpPr>
+          <p:cNvPr id="4" name="TextBox 3"/>
+          <p:cNvSpPr txBox="1"/>
+          <p:nvPr/>
+        </p:nvSpPr>
+        <p:spPr>
+          <a:xfrm>
+            <a:off x="1828800" y="1828800"/>
+            <a:ext cx="6309360" cy="2286000"/>
+          </a:xfrm>
+          <a:prstGeom prst="rect">
+            <a:avLst/>
+          </a:prstGeom>
+          <a:noFill/>
+        </p:spPr>
+        <p:txBody>
+          <a:bodyPr wrap="square" lIns="237744" rIns="237744" tIns="237744" bIns="237744">
+            <a:spAutoFit/>
+          </a:bodyPr>
+          <a:lstStyle/>
+          <a:p>
+            <a:pPr>
+              <a:spcAft>
+                <a:spcPts val="156"/>
+              </a:spcAft>
+              <a:defRPr sz="2600" b="0" i="1">
+                <a:solidFill>
+                  <a:srgbClr val="FFFFFF"/>
+                </a:solidFill>
+                <a:latin typeface="Aptos Display"/>
+              </a:defRPr>
+            </a:pPr>
+            <a:r>
+              <a:t>真正的优势来自工作方式重构，而不只是把模型接进流程。</a:t>
+            </a:r>
+          </a:p>
+        </p:txBody>
+      </p:sp>
+      <p:sp>
+        <p:nvSpPr>
+          <p:cNvPr id="5" name="TextBox 4"/>
+          <p:cNvSpPr txBox="1"/>
+          <p:nvPr/>
+        </p:nvSpPr>
+        <p:spPr>
+          <a:xfrm>
+            <a:off x="1828800" y="4572000"/>
+            <a:ext cx="6309360" cy="457200"/>
+          </a:xfrm>
+          <a:prstGeom prst="rect">
+            <a:avLst/>
+          </a:prstGeom>
+          <a:noFill/>
+        </p:spPr>
+        <p:txBody>
+          <a:bodyPr wrap="square" lIns="237744" rIns="237744" tIns="237744" bIns="237744">
+            <a:spAutoFit/>
+          </a:bodyPr>
+          <a:lstStyle/>
+          <a:p>
+            <a:pPr>
+              <a:spcAft>
+                <a:spcPts val="216"/>
+              </a:spcAft>
+              <a:defRPr sz="1800" b="0" i="0">
+                <a:solidFill>
+                  <a:srgbClr val="C6C9EA"/>
+                </a:solidFill>
+                <a:latin typeface="Aptos"/>
+              </a:defRPr>
+            </a:pPr>
+            <a:r>
+              <a:t>— AutoPPT Sample Desk, AI Operating Model Notes</a:t>
+            </a:r>
+          </a:p>
+        </p:txBody>
+      </p:sp>
+    </p:spTree>
+  </p:cSld>
+  <p:clrMapOvr>
+    <a:masterClrMapping/>
+  </p:clrMapOvr>
+</p:sld>
+</file>
+
+<file path=ppt/slides/slide9.xml><?xml version="1.0" encoding="utf-8"?>
+<p:sld xmlns:a="http://schemas.openxmlformats.org/drawingml/2006/main" xmlns:p="http://schemas.openxmlformats.org/presentationml/2006/main" xmlns:r="http://schemas.openxmlformats.org/officeDocument/2006/relationships">
+  <p:cSld>
+    <p:bg>
+      <p:bgPr>
+        <a:gradFill rotWithShape="1">
+          <a:gsLst>
+            <a:gs pos="0">
+              <a:srgbClr val="2C42A2"/>
+            </a:gs>
+            <a:gs pos="100000">
+              <a:srgbClr val="6C2DA4"/>
+            </a:gs>
+          </a:gsLst>
+          <a:lin scaled="0" ang="5400000"/>
+        </a:gradFill>
+        <a:effectLst/>
+      </p:bgPr>
+    </p:bg>
+    <p:spTree>
+      <p:nvGrpSpPr>
+        <p:cNvPr id="1" name=""/>
+        <p:cNvGrpSpPr/>
+        <p:nvPr/>
+      </p:nvGrpSpPr>
+      <p:grpSpPr/>
+      <p:sp>
+        <p:nvSpPr>
+          <p:cNvPr id="2" name="TextBox 1"/>
+          <p:cNvSpPr txBox="1"/>
+          <p:nvPr/>
+        </p:nvSpPr>
+        <p:spPr>
+          <a:xfrm>
+            <a:off x="640080" y="411480"/>
+            <a:ext cx="7498079" cy="1645920"/>
+          </a:xfrm>
+          <a:prstGeom prst="rect">
+            <a:avLst/>
+          </a:prstGeom>
+          <a:noFill/>
+        </p:spPr>
+        <p:txBody>
+          <a:bodyPr wrap="square" lIns="237744" rIns="237744" tIns="237744" bIns="237744">
+            <a:spAutoFit/>
+          </a:bodyPr>
+          <a:lstStyle/>
+          <a:p>
+            <a:pPr>
+              <a:spcAft>
+                <a:spcPts val="140"/>
+              </a:spcAft>
+              <a:defRPr sz="2800" b="1" i="0">
+                <a:solidFill>
+                  <a:srgbClr val="FFFFFF"/>
+                </a:solidFill>
+                <a:latin typeface="Aptos Display"/>
+              </a:defRPr>
+            </a:pPr>
             <a:r>
               <a:t>References</a:t>
             </a:r>
@@ -4251,41 +5799,143 @@
       </p:sp>
       <p:sp>
         <p:nvSpPr>
-          <p:cNvPr id="3" name="Content Placeholder 2"/>
-          <p:cNvSpPr>
-            <a:spLocks noGrp="1"/>
-          </p:cNvSpPr>
-          <p:nvPr>
-            <p:ph idx="1"/>
-          </p:nvPr>
-        </p:nvSpPr>
-        <p:spPr/>
-        <p:txBody>
-          <a:bodyPr/>
-          <a:lstStyle/>
-          <a:p/>
+          <p:cNvPr id="3" name="Rectangle 2"/>
+          <p:cNvSpPr/>
+          <p:nvPr/>
+        </p:nvSpPr>
+        <p:spPr>
+          <a:xfrm>
+            <a:off x="640080" y="1197863"/>
+            <a:ext cx="1371600" cy="45720"/>
+          </a:xfrm>
+          <a:prstGeom prst="rect">
+            <a:avLst/>
+          </a:prstGeom>
+          <a:solidFill>
+            <a:srgbClr val="4FD8FF"/>
+          </a:solidFill>
+          <a:ln>
+            <a:noFill/>
+          </a:ln>
+        </p:spPr>
+        <p:style>
+          <a:lnRef idx="1">
+            <a:schemeClr val="accent1"/>
+          </a:lnRef>
+          <a:fillRef idx="3">
+            <a:schemeClr val="accent1"/>
+          </a:fillRef>
+          <a:effectRef idx="2">
+            <a:schemeClr val="accent1"/>
+          </a:effectRef>
+          <a:fontRef idx="minor">
+            <a:schemeClr val="lt1"/>
+          </a:fontRef>
+        </p:style>
+        <p:txBody>
+          <a:bodyPr rtlCol="0" anchor="ctr"/>
+          <a:lstStyle/>
+          <a:p>
+            <a:pPr algn="ctr"/>
+          </a:p>
+        </p:txBody>
+      </p:sp>
+      <p:sp>
+        <p:nvSpPr>
+          <p:cNvPr id="4" name="Rounded Rectangle 3"/>
+          <p:cNvSpPr/>
+          <p:nvPr/>
+        </p:nvSpPr>
+        <p:spPr>
+          <a:xfrm>
+            <a:off x="658368" y="1280160"/>
+            <a:ext cx="7827263" cy="5029200"/>
+          </a:xfrm>
+          <a:prstGeom prst="roundRect">
+            <a:avLst/>
+          </a:prstGeom>
+          <a:solidFill>
+            <a:srgbClr val="222A76"/>
+          </a:solidFill>
+          <a:ln w="15875">
+            <a:solidFill>
+              <a:srgbClr val="7C96FF"/>
+            </a:solidFill>
+          </a:ln>
+        </p:spPr>
+        <p:style>
+          <a:lnRef idx="1">
+            <a:schemeClr val="accent1"/>
+          </a:lnRef>
+          <a:fillRef idx="3">
+            <a:schemeClr val="accent1"/>
+          </a:fillRef>
+          <a:effectRef idx="2">
+            <a:schemeClr val="accent1"/>
+          </a:effectRef>
+          <a:fontRef idx="minor">
+            <a:schemeClr val="lt1"/>
+          </a:fontRef>
+        </p:style>
+        <p:txBody>
+          <a:bodyPr rtlCol="0" anchor="ctr"/>
+          <a:lstStyle/>
+          <a:p>
+            <a:pPr algn="ctr"/>
+          </a:p>
+        </p:txBody>
+      </p:sp>
+      <p:sp>
+        <p:nvSpPr>
+          <p:cNvPr id="5" name="TextBox 4"/>
+          <p:cNvSpPr txBox="1"/>
+          <p:nvPr/>
+        </p:nvSpPr>
+        <p:spPr>
+          <a:xfrm>
+            <a:off x="731519" y="1353312"/>
+            <a:ext cx="7680959" cy="4882896"/>
+          </a:xfrm>
+          <a:prstGeom prst="rect">
+            <a:avLst/>
+          </a:prstGeom>
+          <a:noFill/>
+        </p:spPr>
+        <p:txBody>
+          <a:bodyPr wrap="square" lIns="237744" rIns="237744" tIns="237744" bIns="237744">
+            <a:spAutoFit/>
+          </a:bodyPr>
+          <a:lstStyle/>
           <a:p>
             <a:pPr>
-              <a:defRPr sz="1200"/>
+              <a:spcAft>
+                <a:spcPts val="44"/>
+              </a:spcAft>
+              <a:defRPr sz="1100" b="0" i="0">
+                <a:solidFill>
+                  <a:srgbClr val="E7E9FF"/>
+                </a:solidFill>
+                <a:latin typeface="Aptos"/>
+              </a:defRPr>
             </a:pPr>
             <a:r>
-              <a:t>https://zh.wikipedia.org/wiki/人工智能历史</a:t>
+              <a:t>https://www.mckinsey.com/capabilities/quantumblack/our-insights/the-state-of-ai</a:t>
             </a:r>
           </a:p>
           <a:p>
             <a:pPr>
-              <a:defRPr sz="1200"/>
+              <a:spcAft>
+                <a:spcPts val="44"/>
+              </a:spcAft>
+              <a:defRPr sz="1100" b="0" i="0">
+                <a:solidFill>
+                  <a:srgbClr val="E7E9FF"/>
+                </a:solidFill>
+                <a:latin typeface="Aptos"/>
+              </a:defRPr>
             </a:pPr>
             <a:r>
-              <a:t>https://zh.wikipedia.org/wiki/Transformer模型</a:t>
-            </a:r>
-          </a:p>
-          <a:p>
-            <a:pPr>
-              <a:defRPr sz="1200"/>
-            </a:pPr>
-            <a:r>
-              <a:t>https://arxiv.org/abs/1706.03762 (Attention Is All You Need)</a:t>
+              <a:t>https://www.nature.com/subjects/artificial-intelligence</a:t>
             </a:r>
           </a:p>
         </p:txBody>
@@ -4616,324 +6266,4 @@
   </a:objectDefaults>
   <a:extraClrSchemeLst/>
 </a:theme>
-</file>
-
-<file path=ppt/theme/theme2.xml><?xml version="1.0" encoding="utf-8"?>
-<a:theme xmlns:a="http://schemas.openxmlformats.org/drawingml/2006/main" name="Office Theme">
-  <a:themeElements>
-    <a:clrScheme name="Office">
-      <a:dk1>
-        <a:sysClr val="windowText" lastClr="000000"/>
-      </a:dk1>
-      <a:lt1>
-        <a:sysClr val="window" lastClr="FFFFFF"/>
-      </a:lt1>
-      <a:dk2>
-        <a:srgbClr val="1F497D"/>
-      </a:dk2>
-      <a:lt2>
-        <a:srgbClr val="EEECE1"/>
-      </a:lt2>
-      <a:accent1>
-        <a:srgbClr val="4F81BD"/>
-      </a:accent1>
-      <a:accent2>
-        <a:srgbClr val="C0504D"/>
-      </a:accent2>
-      <a:accent3>
-        <a:srgbClr val="9BBB59"/>
-      </a:accent3>
-      <a:accent4>
-        <a:srgbClr val="8064A2"/>
-      </a:accent4>
-      <a:accent5>
-        <a:srgbClr val="4BACC6"/>
-      </a:accent5>
-      <a:accent6>
-        <a:srgbClr val="F79646"/>
-      </a:accent6>
-      <a:hlink>
-        <a:srgbClr val="0000FF"/>
-      </a:hlink>
-      <a:folHlink>
-        <a:srgbClr val="800080"/>
-      </a:folHlink>
-    </a:clrScheme>
-    <a:fontScheme name="Office">
-      <a:majorFont>
-        <a:latin typeface="Calibri"/>
-        <a:ea typeface=""/>
-        <a:cs typeface=""/>
-        <a:font script="Jpan" typeface="ＭＳ Ｐゴシック"/>
-        <a:font script="Hang" typeface="맑은 고딕"/>
-        <a:font script="Hans" typeface="宋体"/>
-        <a:font script="Hant" typeface="新細明體"/>
-        <a:font script="Arab" typeface="Times New Roman"/>
-        <a:font script="Hebr" typeface="Times New Roman"/>
-        <a:font script="Thai" typeface="Angsana New"/>
-        <a:font script="Ethi" typeface="Nyala"/>
-        <a:font script="Beng" typeface="Vrinda"/>
-        <a:font script="Gujr" typeface="Shruti"/>
-        <a:font script="Khmr" typeface="MoolBoran"/>
-        <a:font script="Knda" typeface="Tunga"/>
-        <a:font script="Guru" typeface="Raavi"/>
-        <a:font script="Cans" typeface="Euphemia"/>
-        <a:font script="Cher" typeface="Plantagenet Cherokee"/>
-        <a:font script="Yiii" typeface="Microsoft Yi Baiti"/>
-        <a:font script="Tibt" typeface="Microsoft Himalaya"/>
-        <a:font script="Thaa" typeface="MV Boli"/>
-        <a:font script="Deva" typeface="Mangal"/>
-        <a:font script="Telu" typeface="Gautami"/>
-        <a:font script="Taml" typeface="Latha"/>
-        <a:font script="Syrc" typeface="Estrangelo Edessa"/>
-        <a:font script="Orya" typeface="Kalinga"/>
-        <a:font script="Mlym" typeface="Kartika"/>
-        <a:font script="Laoo" typeface="DokChampa"/>
-        <a:font script="Sinh" typeface="Iskoola Pota"/>
-        <a:font script="Mong" typeface="Mongolian Baiti"/>
-        <a:font script="Viet" typeface="Times New Roman"/>
-        <a:font script="Uigh" typeface="Microsoft Uighur"/>
-        <a:font script="Geor" typeface="Sylfaen"/>
-      </a:majorFont>
-      <a:minorFont>
-        <a:latin typeface="Calibri"/>
-        <a:ea typeface=""/>
-        <a:cs typeface=""/>
-        <a:font script="Jpan" typeface="ＭＳ Ｐゴシック"/>
-        <a:font script="Hang" typeface="맑은 고딕"/>
-        <a:font script="Hans" typeface="宋体"/>
-        <a:font script="Hant" typeface="新細明體"/>
-        <a:font script="Arab" typeface="Arial"/>
-        <a:font script="Hebr" typeface="Arial"/>
-        <a:font script="Thai" typeface="Cordia New"/>
-        <a:font script="Ethi" typeface="Nyala"/>
-        <a:font script="Beng" typeface="Vrinda"/>
-        <a:font script="Gujr" typeface="Shruti"/>
-        <a:font script="Khmr" typeface="DaunPenh"/>
-        <a:font script="Knda" typeface="Tunga"/>
-        <a:font script="Guru" typeface="Raavi"/>
-        <a:font script="Cans" typeface="Euphemia"/>
-        <a:font script="Cher" typeface="Plantagenet Cherokee"/>
-        <a:font script="Yiii" typeface="Microsoft Yi Baiti"/>
-        <a:font script="Tibt" typeface="Microsoft Himalaya"/>
-        <a:font script="Thaa" typeface="MV Boli"/>
-        <a:font script="Deva" typeface="Mangal"/>
-        <a:font script="Telu" typeface="Gautami"/>
-        <a:font script="Taml" typeface="Latha"/>
-        <a:font script="Syrc" typeface="Estrangelo Edessa"/>
-        <a:font script="Orya" typeface="Kalinga"/>
-        <a:font script="Mlym" typeface="Kartika"/>
-        <a:font script="Laoo" typeface="DokChampa"/>
-        <a:font script="Sinh" typeface="Iskoola Pota"/>
-        <a:font script="Mong" typeface="Mongolian Baiti"/>
-        <a:font script="Viet" typeface="Arial"/>
-        <a:font script="Uigh" typeface="Microsoft Uighur"/>
-        <a:font script="Geor" typeface="Sylfaen"/>
-      </a:minorFont>
-    </a:fontScheme>
-    <a:fmtScheme name="Office">
-      <a:fillStyleLst>
-        <a:solidFill>
-          <a:schemeClr val="phClr"/>
-        </a:solidFill>
-        <a:gradFill rotWithShape="1">
-          <a:gsLst>
-            <a:gs pos="0">
-              <a:schemeClr val="phClr">
-                <a:tint val="50000"/>
-                <a:satMod val="300000"/>
-              </a:schemeClr>
-            </a:gs>
-            <a:gs pos="35000">
-              <a:schemeClr val="phClr">
-                <a:tint val="37000"/>
-                <a:satMod val="300000"/>
-              </a:schemeClr>
-            </a:gs>
-            <a:gs pos="100000">
-              <a:schemeClr val="phClr">
-                <a:tint val="15000"/>
-                <a:satMod val="350000"/>
-              </a:schemeClr>
-            </a:gs>
-          </a:gsLst>
-          <a:lin ang="16200000" scaled="1"/>
-        </a:gradFill>
-        <a:gradFill rotWithShape="1">
-          <a:gsLst>
-            <a:gs pos="0">
-              <a:schemeClr val="phClr">
-                <a:tint val="100000"/>
-                <a:shade val="100000"/>
-                <a:satMod val="130000"/>
-              </a:schemeClr>
-            </a:gs>
-            <a:gs pos="100000">
-              <a:schemeClr val="phClr">
-                <a:tint val="50000"/>
-                <a:shade val="100000"/>
-                <a:satMod val="350000"/>
-              </a:schemeClr>
-            </a:gs>
-          </a:gsLst>
-          <a:lin ang="16200000" scaled="0"/>
-        </a:gradFill>
-      </a:fillStyleLst>
-      <a:lnStyleLst>
-        <a:ln w="9525" cap="flat" cmpd="sng" algn="ctr">
-          <a:solidFill>
-            <a:schemeClr val="phClr">
-              <a:shade val="95000"/>
-              <a:satMod val="105000"/>
-            </a:schemeClr>
-          </a:solidFill>
-          <a:prstDash val="solid"/>
-        </a:ln>
-        <a:ln w="25400" cap="flat" cmpd="sng" algn="ctr">
-          <a:solidFill>
-            <a:schemeClr val="phClr"/>
-          </a:solidFill>
-          <a:prstDash val="solid"/>
-        </a:ln>
-        <a:ln w="38100" cap="flat" cmpd="sng" algn="ctr">
-          <a:solidFill>
-            <a:schemeClr val="phClr"/>
-          </a:solidFill>
-          <a:prstDash val="solid"/>
-        </a:ln>
-      </a:lnStyleLst>
-      <a:effectStyleLst>
-        <a:effectStyle>
-          <a:effectLst>
-            <a:outerShdw blurRad="40000" dist="20000" dir="5400000" rotWithShape="0">
-              <a:srgbClr val="000000">
-                <a:alpha val="38000"/>
-              </a:srgbClr>
-            </a:outerShdw>
-          </a:effectLst>
-        </a:effectStyle>
-        <a:effectStyle>
-          <a:effectLst>
-            <a:outerShdw blurRad="40000" dist="23000" dir="5400000" rotWithShape="0">
-              <a:srgbClr val="000000">
-                <a:alpha val="35000"/>
-              </a:srgbClr>
-            </a:outerShdw>
-          </a:effectLst>
-        </a:effectStyle>
-        <a:effectStyle>
-          <a:effectLst>
-            <a:outerShdw blurRad="40000" dist="23000" dir="5400000" rotWithShape="0">
-              <a:srgbClr val="000000">
-                <a:alpha val="35000"/>
-              </a:srgbClr>
-            </a:outerShdw>
-          </a:effectLst>
-          <a:scene3d>
-            <a:camera prst="orthographicFront">
-              <a:rot lat="0" lon="0" rev="0"/>
-            </a:camera>
-            <a:lightRig rig="threePt" dir="t">
-              <a:rot lat="0" lon="0" rev="1200000"/>
-            </a:lightRig>
-          </a:scene3d>
-          <a:sp3d>
-            <a:bevelT w="63500" h="25400"/>
-          </a:sp3d>
-        </a:effectStyle>
-      </a:effectStyleLst>
-      <a:bgFillStyleLst>
-        <a:solidFill>
-          <a:schemeClr val="phClr"/>
-        </a:solidFill>
-        <a:gradFill rotWithShape="1">
-          <a:gsLst>
-            <a:gs pos="0">
-              <a:schemeClr val="phClr">
-                <a:tint val="40000"/>
-                <a:satMod val="350000"/>
-              </a:schemeClr>
-            </a:gs>
-            <a:gs pos="40000">
-              <a:schemeClr val="phClr">
-                <a:tint val="45000"/>
-                <a:shade val="99000"/>
-                <a:satMod val="350000"/>
-              </a:schemeClr>
-            </a:gs>
-            <a:gs pos="100000">
-              <a:schemeClr val="phClr">
-                <a:shade val="20000"/>
-                <a:satMod val="255000"/>
-              </a:schemeClr>
-            </a:gs>
-          </a:gsLst>
-          <a:path path="circle">
-            <a:fillToRect l="50000" t="-80000" r="50000" b="180000"/>
-          </a:path>
-        </a:gradFill>
-        <a:gradFill rotWithShape="1">
-          <a:gsLst>
-            <a:gs pos="0">
-              <a:schemeClr val="phClr">
-                <a:tint val="80000"/>
-                <a:satMod val="300000"/>
-              </a:schemeClr>
-            </a:gs>
-            <a:gs pos="100000">
-              <a:schemeClr val="phClr">
-                <a:shade val="30000"/>
-                <a:satMod val="200000"/>
-              </a:schemeClr>
-            </a:gs>
-          </a:gsLst>
-          <a:path path="circle">
-            <a:fillToRect l="50000" t="50000" r="50000" b="50000"/>
-          </a:path>
-        </a:gradFill>
-      </a:bgFillStyleLst>
-    </a:fmtScheme>
-  </a:themeElements>
-  <a:objectDefaults>
-    <a:spDef>
-      <a:spPr/>
-      <a:bodyPr/>
-      <a:lstStyle/>
-      <a:style>
-        <a:lnRef idx="1">
-          <a:schemeClr val="accent1"/>
-        </a:lnRef>
-        <a:fillRef idx="3">
-          <a:schemeClr val="accent1"/>
-        </a:fillRef>
-        <a:effectRef idx="2">
-          <a:schemeClr val="accent1"/>
-        </a:effectRef>
-        <a:fontRef idx="minor">
-          <a:schemeClr val="lt1"/>
-        </a:fontRef>
-      </a:style>
-    </a:spDef>
-    <a:lnDef>
-      <a:spPr/>
-      <a:bodyPr/>
-      <a:lstStyle/>
-      <a:style>
-        <a:lnRef idx="2">
-          <a:schemeClr val="accent1"/>
-        </a:lnRef>
-        <a:fillRef idx="0">
-          <a:schemeClr val="accent1"/>
-        </a:fillRef>
-        <a:effectRef idx="1">
-          <a:schemeClr val="accent1"/>
-        </a:effectRef>
-        <a:fontRef idx="minor">
-          <a:schemeClr val="tx1"/>
-        </a:fontRef>
-      </a:style>
-    </a:lnDef>
-  </a:objectDefaults>
-  <a:extraClrSchemeLst/>
-</a:theme>
 </file>